--- a/ProtectionProject/presentation/Presentation.pptx
+++ b/ProtectionProject/presentation/Presentation.pptx
@@ -10,6 +10,14 @@
     <p:sldId id="258" r:id="rId4"/>
     <p:sldId id="260" r:id="rId5"/>
     <p:sldId id="261" r:id="rId6"/>
+    <p:sldId id="263" r:id="rId7"/>
+    <p:sldId id="262" r:id="rId8"/>
+    <p:sldId id="264" r:id="rId9"/>
+    <p:sldId id="265" r:id="rId10"/>
+    <p:sldId id="267" r:id="rId11"/>
+    <p:sldId id="268" r:id="rId12"/>
+    <p:sldId id="266" r:id="rId13"/>
+    <p:sldId id="269" r:id="rId14"/>
   </p:sldIdLst>
   <p:sldSz cx="12192000" cy="6858000"/>
   <p:notesSz cx="6858000" cy="9144000"/>
@@ -119,8 +127,7 @@
 <file path=ppt/revisionInfo.xml><?xml version="1.0" encoding="utf-8"?>
 <p1510:revInfo xmlns:a="http://schemas.openxmlformats.org/drawingml/2006/main" xmlns:r="http://schemas.openxmlformats.org/officeDocument/2006/relationships" xmlns:p1510="http://schemas.microsoft.com/office/powerpoint/2015/10/main">
   <p1510:revLst>
-    <p1510:client id="{5DF74275-FBD9-43D1-A18E-0025041076D7}" v="198" dt="2026-05-02T15:05:54.780"/>
-    <p1510:client id="{756BFA37-1D8C-475B-AEA7-FA7C6F89BC93}" v="93" dt="2026-05-02T14:41:54.730"/>
+    <p1510:client id="{1C45FD6F-2048-4F86-A2EA-2A3478BF09FB}" v="427" dt="2026-05-09T16:50:09.240"/>
   </p1510:revLst>
 </p1510:revInfo>
 </file>
@@ -254,7 +261,7 @@
           <a:p>
             <a:fld id="{F2FFB779-270B-4192-84BA-A697F48306DC}" type="datetimeFigureOut">
               <a:rPr lang="ru-RU" smtClean="0"/>
-              <a:t>02.05.2026</a:t>
+              <a:t>09.05.2026</a:t>
             </a:fld>
             <a:endParaRPr lang="ru-RU"/>
           </a:p>
@@ -422,7 +429,7 @@
           <a:p>
             <a:fld id="{F2FFB779-270B-4192-84BA-A697F48306DC}" type="datetimeFigureOut">
               <a:rPr lang="ru-RU" smtClean="0"/>
-              <a:t>02.05.2026</a:t>
+              <a:t>09.05.2026</a:t>
             </a:fld>
             <a:endParaRPr lang="ru-RU"/>
           </a:p>
@@ -600,7 +607,7 @@
           <a:p>
             <a:fld id="{F2FFB779-270B-4192-84BA-A697F48306DC}" type="datetimeFigureOut">
               <a:rPr lang="ru-RU" smtClean="0"/>
-              <a:t>02.05.2026</a:t>
+              <a:t>09.05.2026</a:t>
             </a:fld>
             <a:endParaRPr lang="ru-RU"/>
           </a:p>
@@ -768,7 +775,7 @@
           <a:p>
             <a:fld id="{F2FFB779-270B-4192-84BA-A697F48306DC}" type="datetimeFigureOut">
               <a:rPr lang="ru-RU" smtClean="0"/>
-              <a:t>02.05.2026</a:t>
+              <a:t>09.05.2026</a:t>
             </a:fld>
             <a:endParaRPr lang="ru-RU"/>
           </a:p>
@@ -1013,7 +1020,7 @@
           <a:p>
             <a:fld id="{F2FFB779-270B-4192-84BA-A697F48306DC}" type="datetimeFigureOut">
               <a:rPr lang="ru-RU" smtClean="0"/>
-              <a:t>02.05.2026</a:t>
+              <a:t>09.05.2026</a:t>
             </a:fld>
             <a:endParaRPr lang="ru-RU"/>
           </a:p>
@@ -1242,7 +1249,7 @@
           <a:p>
             <a:fld id="{F2FFB779-270B-4192-84BA-A697F48306DC}" type="datetimeFigureOut">
               <a:rPr lang="ru-RU" smtClean="0"/>
-              <a:t>02.05.2026</a:t>
+              <a:t>09.05.2026</a:t>
             </a:fld>
             <a:endParaRPr lang="ru-RU"/>
           </a:p>
@@ -1606,7 +1613,7 @@
           <a:p>
             <a:fld id="{F2FFB779-270B-4192-84BA-A697F48306DC}" type="datetimeFigureOut">
               <a:rPr lang="ru-RU" smtClean="0"/>
-              <a:t>02.05.2026</a:t>
+              <a:t>09.05.2026</a:t>
             </a:fld>
             <a:endParaRPr lang="ru-RU"/>
           </a:p>
@@ -1723,7 +1730,7 @@
           <a:p>
             <a:fld id="{F2FFB779-270B-4192-84BA-A697F48306DC}" type="datetimeFigureOut">
               <a:rPr lang="ru-RU" smtClean="0"/>
-              <a:t>02.05.2026</a:t>
+              <a:t>09.05.2026</a:t>
             </a:fld>
             <a:endParaRPr lang="ru-RU"/>
           </a:p>
@@ -1818,7 +1825,7 @@
           <a:p>
             <a:fld id="{F2FFB779-270B-4192-84BA-A697F48306DC}" type="datetimeFigureOut">
               <a:rPr lang="ru-RU" smtClean="0"/>
-              <a:t>02.05.2026</a:t>
+              <a:t>09.05.2026</a:t>
             </a:fld>
             <a:endParaRPr lang="ru-RU"/>
           </a:p>
@@ -2093,7 +2100,7 @@
           <a:p>
             <a:fld id="{F2FFB779-270B-4192-84BA-A697F48306DC}" type="datetimeFigureOut">
               <a:rPr lang="ru-RU" smtClean="0"/>
-              <a:t>02.05.2026</a:t>
+              <a:t>09.05.2026</a:t>
             </a:fld>
             <a:endParaRPr lang="ru-RU"/>
           </a:p>
@@ -2345,7 +2352,7 @@
           <a:p>
             <a:fld id="{F2FFB779-270B-4192-84BA-A697F48306DC}" type="datetimeFigureOut">
               <a:rPr lang="ru-RU" smtClean="0"/>
-              <a:t>02.05.2026</a:t>
+              <a:t>09.05.2026</a:t>
             </a:fld>
             <a:endParaRPr lang="ru-RU"/>
           </a:p>
@@ -2556,7 +2563,7 @@
           <a:p>
             <a:fld id="{F2FFB779-270B-4192-84BA-A697F48306DC}" type="datetimeFigureOut">
               <a:rPr lang="ru-RU" smtClean="0"/>
-              <a:t>02.05.2026</a:t>
+              <a:t>09.05.2026</a:t>
             </a:fld>
             <a:endParaRPr lang="ru-RU"/>
           </a:p>
@@ -3332,6 +3339,3637 @@
 </p:sld>
 </file>
 
+<file path=ppt/slides/slide10.xml><?xml version="1.0" encoding="utf-8"?>
+<p:sld xmlns:a="http://schemas.openxmlformats.org/drawingml/2006/main" xmlns:r="http://schemas.openxmlformats.org/officeDocument/2006/relationships" xmlns:p="http://schemas.openxmlformats.org/presentationml/2006/main">
+  <p:cSld>
+    <p:spTree>
+      <p:nvGrpSpPr>
+        <p:cNvPr id="1" name="">
+          <a:extLst>
+            <a:ext uri="{FF2B5EF4-FFF2-40B4-BE49-F238E27FC236}">
+              <a16:creationId xmlns:a16="http://schemas.microsoft.com/office/drawing/2014/main" id="{D2DB2A37-9AB7-D037-F9D4-86DAA3E82396}"/>
+            </a:ext>
+          </a:extLst>
+        </p:cNvPr>
+        <p:cNvGrpSpPr/>
+        <p:nvPr/>
+      </p:nvGrpSpPr>
+      <p:grpSpPr>
+        <a:xfrm>
+          <a:off x="0" y="0"/>
+          <a:ext cx="0" cy="0"/>
+          <a:chOff x="0" y="0"/>
+          <a:chExt cx="0" cy="0"/>
+        </a:xfrm>
+      </p:grpSpPr>
+      <p:sp>
+        <p:nvSpPr>
+          <p:cNvPr id="3" name="Прямоугольник: скругленные углы 2">
+            <a:extLst>
+              <a:ext uri="{FF2B5EF4-FFF2-40B4-BE49-F238E27FC236}">
+                <a16:creationId xmlns:a16="http://schemas.microsoft.com/office/drawing/2014/main" id="{38BBC5EE-B275-F4D8-DFFE-5641244C9FBA}"/>
+              </a:ext>
+            </a:extLst>
+          </p:cNvPr>
+          <p:cNvSpPr/>
+          <p:nvPr/>
+        </p:nvSpPr>
+        <p:spPr>
+          <a:xfrm>
+            <a:off x="4146603" y="216088"/>
+            <a:ext cx="3898204" cy="6402676"/>
+          </a:xfrm>
+          <a:prstGeom prst="roundRect">
+            <a:avLst/>
+          </a:prstGeom>
+          <a:solidFill>
+            <a:srgbClr val="EDE8ED"/>
+          </a:solidFill>
+          <a:ln>
+            <a:solidFill>
+              <a:srgbClr val="EDE8ED"/>
+            </a:solidFill>
+          </a:ln>
+        </p:spPr>
+        <p:style>
+          <a:lnRef idx="2">
+            <a:schemeClr val="accent1">
+              <a:shade val="15000"/>
+            </a:schemeClr>
+          </a:lnRef>
+          <a:fillRef idx="1">
+            <a:schemeClr val="accent1"/>
+          </a:fillRef>
+          <a:effectRef idx="0">
+            <a:schemeClr val="accent1"/>
+          </a:effectRef>
+          <a:fontRef idx="minor">
+            <a:schemeClr val="lt1"/>
+          </a:fontRef>
+        </p:style>
+        <p:txBody>
+          <a:bodyPr lIns="91440" tIns="45720" rIns="91440" bIns="45720" rtlCol="0" anchor="ctr"/>
+          <a:lstStyle/>
+          <a:p>
+            <a:pPr algn="ctr"/>
+            <a:endParaRPr lang="ru-RU" dirty="0"/>
+          </a:p>
+        </p:txBody>
+      </p:sp>
+      <p:sp>
+        <p:nvSpPr>
+          <p:cNvPr id="4" name="TextBox 3">
+            <a:extLst>
+              <a:ext uri="{FF2B5EF4-FFF2-40B4-BE49-F238E27FC236}">
+                <a16:creationId xmlns:a16="http://schemas.microsoft.com/office/drawing/2014/main" id="{B9BF1AD1-6303-AD4F-C2AC-B4BE630C3365}"/>
+              </a:ext>
+            </a:extLst>
+          </p:cNvPr>
+          <p:cNvSpPr txBox="1"/>
+          <p:nvPr/>
+        </p:nvSpPr>
+        <p:spPr>
+          <a:xfrm>
+            <a:off x="4146467" y="332110"/>
+            <a:ext cx="3901043" cy="6524863"/>
+          </a:xfrm>
+          <a:prstGeom prst="rect">
+            <a:avLst/>
+          </a:prstGeom>
+          <a:noFill/>
+        </p:spPr>
+        <p:txBody>
+          <a:bodyPr rot="0" spcFirstLastPara="0" vertOverflow="overflow" horzOverflow="overflow" vert="horz" wrap="square" lIns="91440" tIns="45720" rIns="91440" bIns="45720" numCol="1" spcCol="0" rtlCol="0" fromWordArt="0" anchor="ctr" anchorCtr="0" forceAA="0" compatLnSpc="1">
+            <a:prstTxWarp prst="textNoShape">
+              <a:avLst/>
+            </a:prstTxWarp>
+            <a:spAutoFit/>
+          </a:bodyPr>
+          <a:lstStyle/>
+          <a:p>
+            <a:pPr algn="ctr"/>
+            <a:r>
+              <a:rPr lang="ru-RU" sz="1600">
+                <a:solidFill>
+                  <a:srgbClr val="323336"/>
+                </a:solidFill>
+                <a:ea typeface="+mn-lt"/>
+                <a:cs typeface="+mn-lt"/>
+              </a:rPr>
+              <a:t>Основная логика приложения реализована в файле main.py, где находятся маршруты Flask, обработка запросов и взаимодействие с базой данных.</a:t>
+            </a:r>
+            <a:endParaRPr lang="ru-RU"/>
+          </a:p>
+          <a:p>
+            <a:pPr algn="ctr"/>
+            <a:endParaRPr lang="ru-RU" sz="1600" dirty="0">
+              <a:solidFill>
+                <a:srgbClr val="323336"/>
+              </a:solidFill>
+              <a:ea typeface="+mn-lt"/>
+              <a:cs typeface="+mn-lt"/>
+            </a:endParaRPr>
+          </a:p>
+          <a:p>
+            <a:pPr algn="ctr"/>
+            <a:r>
+              <a:rPr lang="ru-RU" sz="1600">
+                <a:solidFill>
+                  <a:srgbClr val="323336"/>
+                </a:solidFill>
+                <a:ea typeface="+mn-lt"/>
+                <a:cs typeface="+mn-lt"/>
+              </a:rPr>
+              <a:t>Для работы с данными используется отдельный пакет data, содержащий классы моделей:</a:t>
+            </a:r>
+          </a:p>
+          <a:p>
+            <a:pPr algn="ctr"/>
+            <a:r>
+              <a:rPr lang="ru-RU" sz="1600">
+                <a:solidFill>
+                  <a:srgbClr val="323336"/>
+                </a:solidFill>
+                <a:ea typeface="+mn-lt"/>
+                <a:cs typeface="+mn-lt"/>
+              </a:rPr>
+              <a:t>User — хранение информации о пользователях, авторизация и работа с паролями;</a:t>
+            </a:r>
+          </a:p>
+          <a:p>
+            <a:pPr algn="ctr"/>
+            <a:r>
+              <a:rPr lang="ru-RU" sz="1600">
+                <a:solidFill>
+                  <a:srgbClr val="323336"/>
+                </a:solidFill>
+                <a:ea typeface="+mn-lt"/>
+                <a:cs typeface="+mn-lt"/>
+              </a:rPr>
+              <a:t>Recipe — хранение рецептов, ингредиентов, изображений и характеристик блюда;</a:t>
+            </a:r>
+          </a:p>
+          <a:p>
+            <a:pPr algn="ctr"/>
+            <a:r>
+              <a:rPr lang="ru-RU" sz="1600">
+                <a:solidFill>
+                  <a:srgbClr val="323336"/>
+                </a:solidFill>
+                <a:ea typeface="+mn-lt"/>
+                <a:cs typeface="+mn-lt"/>
+              </a:rPr>
+              <a:t>Comment — система комментариев и ответов;</a:t>
+            </a:r>
+          </a:p>
+          <a:p>
+            <a:pPr algn="ctr"/>
+            <a:r>
+              <a:rPr lang="ru-RU" sz="1600">
+                <a:solidFill>
+                  <a:srgbClr val="323336"/>
+                </a:solidFill>
+                <a:ea typeface="+mn-lt"/>
+                <a:cs typeface="+mn-lt"/>
+              </a:rPr>
+              <a:t>Like — обработка лайков;</a:t>
+            </a:r>
+          </a:p>
+          <a:p>
+            <a:pPr algn="ctr"/>
+            <a:r>
+              <a:rPr lang="ru-RU" sz="1600">
+                <a:solidFill>
+                  <a:srgbClr val="323336"/>
+                </a:solidFill>
+                <a:ea typeface="+mn-lt"/>
+                <a:cs typeface="+mn-lt"/>
+              </a:rPr>
+              <a:t>Subscription — подписки между пользователями;</a:t>
+            </a:r>
+          </a:p>
+          <a:p>
+            <a:pPr algn="ctr"/>
+            <a:r>
+              <a:rPr lang="ru-RU" sz="1600">
+                <a:solidFill>
+                  <a:srgbClr val="323336"/>
+                </a:solidFill>
+                <a:ea typeface="+mn-lt"/>
+                <a:cs typeface="+mn-lt"/>
+              </a:rPr>
+              <a:t>Message — личные сообщения и чат;</a:t>
+            </a:r>
+          </a:p>
+          <a:p>
+            <a:pPr algn="ctr"/>
+            <a:r>
+              <a:rPr lang="ru-RU" sz="1600">
+                <a:solidFill>
+                  <a:srgbClr val="323336"/>
+                </a:solidFill>
+                <a:ea typeface="+mn-lt"/>
+                <a:cs typeface="+mn-lt"/>
+              </a:rPr>
+              <a:t>View — учёт просмотров рецептов;</a:t>
+            </a:r>
+          </a:p>
+          <a:p>
+            <a:pPr algn="ctr"/>
+            <a:r>
+              <a:rPr lang="ru-RU" sz="1600">
+                <a:solidFill>
+                  <a:srgbClr val="323336"/>
+                </a:solidFill>
+                <a:ea typeface="+mn-lt"/>
+                <a:cs typeface="+mn-lt"/>
+              </a:rPr>
+              <a:t>db_session — настройка подключения к базе данных и создание сессий SQLAlchemy.</a:t>
+            </a:r>
+          </a:p>
+          <a:p>
+            <a:pPr algn="l"/>
+            <a:endParaRPr lang="ru-RU" dirty="0"/>
+          </a:p>
+        </p:txBody>
+      </p:sp>
+      <p:sp>
+        <p:nvSpPr>
+          <p:cNvPr id="6" name="Прямоугольник: скругленные углы 5">
+            <a:extLst>
+              <a:ext uri="{FF2B5EF4-FFF2-40B4-BE49-F238E27FC236}">
+                <a16:creationId xmlns:a16="http://schemas.microsoft.com/office/drawing/2014/main" id="{DA42817D-6FB4-6ED7-D6A0-658262567F32}"/>
+              </a:ext>
+            </a:extLst>
+          </p:cNvPr>
+          <p:cNvSpPr/>
+          <p:nvPr/>
+        </p:nvSpPr>
+        <p:spPr>
+          <a:xfrm>
+            <a:off x="-4106748" y="176504"/>
+            <a:ext cx="3898204" cy="6402676"/>
+          </a:xfrm>
+          <a:prstGeom prst="roundRect">
+            <a:avLst/>
+          </a:prstGeom>
+          <a:solidFill>
+            <a:srgbClr val="EDE8ED"/>
+          </a:solidFill>
+          <a:ln>
+            <a:solidFill>
+              <a:srgbClr val="EDE8ED"/>
+            </a:solidFill>
+          </a:ln>
+        </p:spPr>
+        <p:style>
+          <a:lnRef idx="2">
+            <a:schemeClr val="accent1">
+              <a:shade val="15000"/>
+            </a:schemeClr>
+          </a:lnRef>
+          <a:fillRef idx="1">
+            <a:schemeClr val="accent1"/>
+          </a:fillRef>
+          <a:effectRef idx="0">
+            <a:schemeClr val="accent1"/>
+          </a:effectRef>
+          <a:fontRef idx="minor">
+            <a:schemeClr val="lt1"/>
+          </a:fontRef>
+        </p:style>
+        <p:txBody>
+          <a:bodyPr lIns="91440" tIns="45720" rIns="91440" bIns="45720" rtlCol="0" anchor="ctr"/>
+          <a:lstStyle/>
+          <a:p>
+            <a:pPr algn="ctr"/>
+            <a:endParaRPr lang="ru-RU" dirty="0"/>
+          </a:p>
+        </p:txBody>
+      </p:sp>
+      <p:sp>
+        <p:nvSpPr>
+          <p:cNvPr id="7" name="Прямоугольник: скругленные углы 6">
+            <a:extLst>
+              <a:ext uri="{FF2B5EF4-FFF2-40B4-BE49-F238E27FC236}">
+                <a16:creationId xmlns:a16="http://schemas.microsoft.com/office/drawing/2014/main" id="{4C358A73-1F3A-3E7E-BD3C-0CD203BA1C70}"/>
+              </a:ext>
+            </a:extLst>
+          </p:cNvPr>
+          <p:cNvSpPr/>
+          <p:nvPr/>
+        </p:nvSpPr>
+        <p:spPr>
+          <a:xfrm>
+            <a:off x="12340577" y="136918"/>
+            <a:ext cx="3898204" cy="6402676"/>
+          </a:xfrm>
+          <a:prstGeom prst="roundRect">
+            <a:avLst/>
+          </a:prstGeom>
+          <a:solidFill>
+            <a:srgbClr val="EDE8ED"/>
+          </a:solidFill>
+          <a:ln>
+            <a:solidFill>
+              <a:srgbClr val="EDE8ED"/>
+            </a:solidFill>
+          </a:ln>
+        </p:spPr>
+        <p:style>
+          <a:lnRef idx="2">
+            <a:schemeClr val="accent1">
+              <a:shade val="15000"/>
+            </a:schemeClr>
+          </a:lnRef>
+          <a:fillRef idx="1">
+            <a:schemeClr val="accent1"/>
+          </a:fillRef>
+          <a:effectRef idx="0">
+            <a:schemeClr val="accent1"/>
+          </a:effectRef>
+          <a:fontRef idx="minor">
+            <a:schemeClr val="lt1"/>
+          </a:fontRef>
+        </p:style>
+        <p:txBody>
+          <a:bodyPr lIns="91440" tIns="45720" rIns="91440" bIns="45720" rtlCol="0" anchor="ctr"/>
+          <a:lstStyle/>
+          <a:p>
+            <a:pPr algn="ctr"/>
+            <a:endParaRPr lang="ru-RU" dirty="0"/>
+          </a:p>
+        </p:txBody>
+      </p:sp>
+      <p:sp>
+        <p:nvSpPr>
+          <p:cNvPr id="9" name="TextBox 8">
+            <a:extLst>
+              <a:ext uri="{FF2B5EF4-FFF2-40B4-BE49-F238E27FC236}">
+                <a16:creationId xmlns:a16="http://schemas.microsoft.com/office/drawing/2014/main" id="{B1612F87-2E11-1072-D6E0-7B36F0B6B2AE}"/>
+              </a:ext>
+            </a:extLst>
+          </p:cNvPr>
+          <p:cNvSpPr txBox="1"/>
+          <p:nvPr/>
+        </p:nvSpPr>
+        <p:spPr>
+          <a:xfrm>
+            <a:off x="-4106884" y="172593"/>
+            <a:ext cx="3901043" cy="6278642"/>
+          </a:xfrm>
+          <a:prstGeom prst="rect">
+            <a:avLst/>
+          </a:prstGeom>
+          <a:noFill/>
+        </p:spPr>
+        <p:txBody>
+          <a:bodyPr rot="0" spcFirstLastPara="0" vertOverflow="overflow" horzOverflow="overflow" vert="horz" wrap="square" lIns="91440" tIns="45720" rIns="91440" bIns="45720" numCol="1" spcCol="0" rtlCol="0" fromWordArt="0" anchor="ctr" anchorCtr="0" forceAA="0" compatLnSpc="1">
+            <a:prstTxWarp prst="textNoShape">
+              <a:avLst/>
+            </a:prstTxWarp>
+            <a:spAutoFit/>
+          </a:bodyPr>
+          <a:lstStyle/>
+          <a:p>
+            <a:pPr algn="ctr"/>
+            <a:endParaRPr lang="ru-RU" sz="1600" dirty="0">
+              <a:solidFill>
+                <a:srgbClr val="323336"/>
+              </a:solidFill>
+            </a:endParaRPr>
+          </a:p>
+          <a:p>
+            <a:pPr algn="ctr"/>
+            <a:r>
+              <a:rPr lang="ru-RU" sz="1600">
+                <a:solidFill>
+                  <a:srgbClr val="323336"/>
+                </a:solidFill>
+                <a:ea typeface="+mn-lt"/>
+                <a:cs typeface="+mn-lt"/>
+              </a:rPr>
+              <a:t>При разработке проекта использовались следующие технологии:</a:t>
+            </a:r>
+            <a:endParaRPr lang="ru-RU">
+              <a:ea typeface="+mn-lt"/>
+              <a:cs typeface="+mn-lt"/>
+            </a:endParaRPr>
+          </a:p>
+          <a:p>
+            <a:pPr algn="ctr"/>
+            <a:endParaRPr lang="ru-RU" sz="1600" dirty="0">
+              <a:solidFill>
+                <a:srgbClr val="323336"/>
+              </a:solidFill>
+              <a:ea typeface="+mn-lt"/>
+              <a:cs typeface="+mn-lt"/>
+            </a:endParaRPr>
+          </a:p>
+          <a:p>
+            <a:pPr algn="ctr"/>
+            <a:r>
+              <a:rPr lang="ru-RU" sz="1600">
+                <a:solidFill>
+                  <a:srgbClr val="323336"/>
+                </a:solidFill>
+                <a:ea typeface="+mn-lt"/>
+                <a:cs typeface="+mn-lt"/>
+              </a:rPr>
+              <a:t>Python — основной язык разработки</a:t>
+            </a:r>
+            <a:endParaRPr lang="ru-RU">
+              <a:solidFill>
+                <a:srgbClr val="000000"/>
+              </a:solidFill>
+              <a:ea typeface="+mn-lt"/>
+              <a:cs typeface="+mn-lt"/>
+            </a:endParaRPr>
+          </a:p>
+          <a:p>
+            <a:pPr algn="ctr"/>
+            <a:endParaRPr lang="ru-RU" sz="1600" dirty="0">
+              <a:solidFill>
+                <a:srgbClr val="323336"/>
+              </a:solidFill>
+            </a:endParaRPr>
+          </a:p>
+          <a:p>
+            <a:pPr algn="ctr"/>
+            <a:r>
+              <a:rPr lang="ru-RU" sz="1600" dirty="0">
+                <a:solidFill>
+                  <a:srgbClr val="323336"/>
+                </a:solidFill>
+                <a:ea typeface="+mn-lt"/>
+                <a:cs typeface="+mn-lt"/>
+              </a:rPr>
+              <a:t>Flask — создание веб-приложения и </a:t>
+            </a:r>
+            <a:r>
+              <a:rPr lang="ru-RU" sz="1600">
+                <a:solidFill>
+                  <a:srgbClr val="323336"/>
+                </a:solidFill>
+                <a:ea typeface="+mn-lt"/>
+                <a:cs typeface="+mn-lt"/>
+              </a:rPr>
+              <a:t>маршрутизации</a:t>
+            </a:r>
+            <a:endParaRPr lang="ru-RU">
+              <a:solidFill>
+                <a:srgbClr val="000000"/>
+              </a:solidFill>
+              <a:ea typeface="+mn-lt"/>
+              <a:cs typeface="+mn-lt"/>
+            </a:endParaRPr>
+          </a:p>
+          <a:p>
+            <a:pPr algn="ctr"/>
+            <a:endParaRPr lang="ru-RU" sz="1600" dirty="0">
+              <a:solidFill>
+                <a:srgbClr val="323336"/>
+              </a:solidFill>
+            </a:endParaRPr>
+          </a:p>
+          <a:p>
+            <a:pPr algn="ctr"/>
+            <a:r>
+              <a:rPr lang="ru-RU" sz="1600" dirty="0">
+                <a:solidFill>
+                  <a:srgbClr val="323336"/>
+                </a:solidFill>
+                <a:ea typeface="+mn-lt"/>
+                <a:cs typeface="+mn-lt"/>
+              </a:rPr>
+              <a:t>SQLAlchemy — работа с базой данных </a:t>
+            </a:r>
+            <a:r>
+              <a:rPr lang="ru-RU" sz="1600">
+                <a:solidFill>
+                  <a:srgbClr val="323336"/>
+                </a:solidFill>
+                <a:ea typeface="+mn-lt"/>
+                <a:cs typeface="+mn-lt"/>
+              </a:rPr>
+              <a:t>через ORM</a:t>
+            </a:r>
+            <a:endParaRPr lang="ru-RU">
+              <a:solidFill>
+                <a:srgbClr val="000000"/>
+              </a:solidFill>
+              <a:ea typeface="+mn-lt"/>
+              <a:cs typeface="+mn-lt"/>
+            </a:endParaRPr>
+          </a:p>
+          <a:p>
+            <a:pPr algn="ctr"/>
+            <a:endParaRPr lang="ru-RU" sz="1600" dirty="0">
+              <a:solidFill>
+                <a:srgbClr val="323336"/>
+              </a:solidFill>
+              <a:ea typeface="+mn-lt"/>
+              <a:cs typeface="+mn-lt"/>
+            </a:endParaRPr>
+          </a:p>
+          <a:p>
+            <a:pPr algn="ctr"/>
+            <a:r>
+              <a:rPr lang="ru-RU" sz="1600">
+                <a:solidFill>
+                  <a:srgbClr val="323336"/>
+                </a:solidFill>
+                <a:ea typeface="+mn-lt"/>
+                <a:cs typeface="+mn-lt"/>
+              </a:rPr>
+              <a:t>SQLite — хранение данных приложения</a:t>
+            </a:r>
+            <a:endParaRPr lang="ru-RU">
+              <a:solidFill>
+                <a:srgbClr val="000000"/>
+              </a:solidFill>
+              <a:ea typeface="+mn-lt"/>
+              <a:cs typeface="+mn-lt"/>
+            </a:endParaRPr>
+          </a:p>
+          <a:p>
+            <a:pPr algn="ctr"/>
+            <a:endParaRPr lang="ru-RU" sz="1600" dirty="0">
+              <a:solidFill>
+                <a:srgbClr val="323336"/>
+              </a:solidFill>
+              <a:ea typeface="+mn-lt"/>
+              <a:cs typeface="+mn-lt"/>
+            </a:endParaRPr>
+          </a:p>
+          <a:p>
+            <a:pPr algn="ctr"/>
+            <a:r>
+              <a:rPr lang="ru-RU" sz="1600" dirty="0">
+                <a:solidFill>
+                  <a:srgbClr val="323336"/>
+                </a:solidFill>
+                <a:ea typeface="+mn-lt"/>
+                <a:cs typeface="+mn-lt"/>
+              </a:rPr>
+              <a:t>Flask-Login — система регистрации и </a:t>
+            </a:r>
+            <a:r>
+              <a:rPr lang="ru-RU" sz="1600">
+                <a:solidFill>
+                  <a:srgbClr val="323336"/>
+                </a:solidFill>
+                <a:ea typeface="+mn-lt"/>
+                <a:cs typeface="+mn-lt"/>
+              </a:rPr>
+              <a:t>авторизации пользователей</a:t>
+            </a:r>
+            <a:endParaRPr lang="ru-RU">
+              <a:solidFill>
+                <a:srgbClr val="000000"/>
+              </a:solidFill>
+              <a:ea typeface="+mn-lt"/>
+              <a:cs typeface="+mn-lt"/>
+            </a:endParaRPr>
+          </a:p>
+          <a:p>
+            <a:pPr algn="ctr"/>
+            <a:endParaRPr lang="ru-RU" sz="1600" dirty="0">
+              <a:solidFill>
+                <a:srgbClr val="323336"/>
+              </a:solidFill>
+              <a:ea typeface="+mn-lt"/>
+              <a:cs typeface="+mn-lt"/>
+            </a:endParaRPr>
+          </a:p>
+          <a:p>
+            <a:pPr algn="ctr"/>
+            <a:r>
+              <a:rPr lang="ru-RU" sz="1600" dirty="0">
+                <a:solidFill>
+                  <a:srgbClr val="323336"/>
+                </a:solidFill>
+                <a:ea typeface="+mn-lt"/>
+                <a:cs typeface="+mn-lt"/>
+              </a:rPr>
+              <a:t>Pillow — обработка и оптимизация </a:t>
+            </a:r>
+            <a:r>
+              <a:rPr lang="ru-RU" sz="1600">
+                <a:solidFill>
+                  <a:srgbClr val="323336"/>
+                </a:solidFill>
+                <a:ea typeface="+mn-lt"/>
+                <a:cs typeface="+mn-lt"/>
+              </a:rPr>
+              <a:t>изображений</a:t>
+            </a:r>
+            <a:endParaRPr lang="ru-RU">
+              <a:ea typeface="+mn-lt"/>
+              <a:cs typeface="+mn-lt"/>
+            </a:endParaRPr>
+          </a:p>
+          <a:p>
+            <a:pPr algn="ctr"/>
+            <a:endParaRPr lang="ru-RU" sz="1600" dirty="0">
+              <a:solidFill>
+                <a:srgbClr val="323336"/>
+              </a:solidFill>
+              <a:ea typeface="+mn-lt"/>
+              <a:cs typeface="+mn-lt"/>
+            </a:endParaRPr>
+          </a:p>
+          <a:p>
+            <a:pPr algn="ctr"/>
+            <a:r>
+              <a:rPr lang="ru-RU" sz="1600" dirty="0">
+                <a:solidFill>
+                  <a:srgbClr val="323336"/>
+                </a:solidFill>
+                <a:ea typeface="+mn-lt"/>
+                <a:cs typeface="+mn-lt"/>
+              </a:rPr>
+              <a:t>HTML, CSS и Jinja2 — создание </a:t>
+            </a:r>
+            <a:r>
+              <a:rPr lang="ru-RU" sz="1600">
+                <a:solidFill>
+                  <a:srgbClr val="323336"/>
+                </a:solidFill>
+                <a:ea typeface="+mn-lt"/>
+                <a:cs typeface="+mn-lt"/>
+              </a:rPr>
+              <a:t>пользовательского интерфейса</a:t>
+            </a:r>
+            <a:endParaRPr lang="ru-RU">
+              <a:ea typeface="+mn-lt"/>
+              <a:cs typeface="+mn-lt"/>
+            </a:endParaRPr>
+          </a:p>
+          <a:p>
+            <a:pPr algn="ctr"/>
+            <a:endParaRPr lang="ru-RU" sz="1600" dirty="0">
+              <a:solidFill>
+                <a:srgbClr val="323336"/>
+              </a:solidFill>
+              <a:ea typeface="+mn-lt"/>
+              <a:cs typeface="+mn-lt"/>
+            </a:endParaRPr>
+          </a:p>
+          <a:p>
+            <a:pPr algn="l"/>
+            <a:endParaRPr lang="ru-RU" dirty="0"/>
+          </a:p>
+        </p:txBody>
+      </p:sp>
+      <p:sp>
+        <p:nvSpPr>
+          <p:cNvPr id="10" name="TextBox 9">
+            <a:extLst>
+              <a:ext uri="{FF2B5EF4-FFF2-40B4-BE49-F238E27FC236}">
+                <a16:creationId xmlns:a16="http://schemas.microsoft.com/office/drawing/2014/main" id="{453E9791-ECDB-523B-5C70-13A055339590}"/>
+              </a:ext>
+            </a:extLst>
+          </p:cNvPr>
+          <p:cNvSpPr txBox="1"/>
+          <p:nvPr/>
+        </p:nvSpPr>
+        <p:spPr>
+          <a:xfrm>
+            <a:off x="12340440" y="144085"/>
+            <a:ext cx="3901043" cy="6771084"/>
+          </a:xfrm>
+          <a:prstGeom prst="rect">
+            <a:avLst/>
+          </a:prstGeom>
+          <a:noFill/>
+        </p:spPr>
+        <p:txBody>
+          <a:bodyPr rot="0" spcFirstLastPara="0" vertOverflow="overflow" horzOverflow="overflow" vert="horz" wrap="square" lIns="91440" tIns="45720" rIns="91440" bIns="45720" numCol="1" spcCol="0" rtlCol="0" fromWordArt="0" anchor="ctr" anchorCtr="0" forceAA="0" compatLnSpc="1">
+            <a:prstTxWarp prst="textNoShape">
+              <a:avLst/>
+            </a:prstTxWarp>
+            <a:spAutoFit/>
+          </a:bodyPr>
+          <a:lstStyle/>
+          <a:p>
+            <a:pPr algn="ctr"/>
+            <a:r>
+              <a:rPr lang="ru-RU" sz="1600">
+                <a:solidFill>
+                  <a:srgbClr val="323336"/>
+                </a:solidFill>
+                <a:ea typeface="+mn-lt"/>
+                <a:cs typeface="+mn-lt"/>
+              </a:rPr>
+              <a:t>К особенностям проекта можно отнести:</a:t>
+            </a:r>
+            <a:endParaRPr lang="ru-RU">
+              <a:ea typeface="+mn-lt"/>
+              <a:cs typeface="+mn-lt"/>
+            </a:endParaRPr>
+          </a:p>
+          <a:p>
+            <a:pPr algn="ctr"/>
+            <a:r>
+              <a:rPr lang="ru-RU" sz="1600" dirty="0">
+                <a:solidFill>
+                  <a:srgbClr val="323336"/>
+                </a:solidFill>
+                <a:ea typeface="+mn-lt"/>
+                <a:cs typeface="+mn-lt"/>
+              </a:rPr>
+              <a:t>• регистрацию и авторизацию </a:t>
+            </a:r>
+            <a:r>
+              <a:rPr lang="ru-RU" sz="1600">
+                <a:solidFill>
+                  <a:srgbClr val="323336"/>
+                </a:solidFill>
+                <a:ea typeface="+mn-lt"/>
+                <a:cs typeface="+mn-lt"/>
+              </a:rPr>
+              <a:t>пользователей</a:t>
+            </a:r>
+            <a:endParaRPr lang="ru-RU">
+              <a:ea typeface="+mn-lt"/>
+              <a:cs typeface="+mn-lt"/>
+            </a:endParaRPr>
+          </a:p>
+          <a:p>
+            <a:pPr algn="ctr"/>
+            <a:endParaRPr lang="ru-RU" sz="1600" dirty="0">
+              <a:solidFill>
+                <a:srgbClr val="323336"/>
+              </a:solidFill>
+              <a:ea typeface="+mn-lt"/>
+              <a:cs typeface="+mn-lt"/>
+            </a:endParaRPr>
+          </a:p>
+          <a:p>
+            <a:pPr algn="ctr"/>
+            <a:r>
+              <a:rPr lang="ru-RU" sz="1600" dirty="0">
+                <a:solidFill>
+                  <a:srgbClr val="323336"/>
+                </a:solidFill>
+                <a:ea typeface="+mn-lt"/>
+                <a:cs typeface="+mn-lt"/>
+              </a:rPr>
+              <a:t>• создание, редактирование и удаление </a:t>
+            </a:r>
+            <a:r>
+              <a:rPr lang="ru-RU" sz="1600">
+                <a:solidFill>
+                  <a:srgbClr val="323336"/>
+                </a:solidFill>
+                <a:ea typeface="+mn-lt"/>
+                <a:cs typeface="+mn-lt"/>
+              </a:rPr>
+              <a:t>рецептов</a:t>
+            </a:r>
+            <a:endParaRPr lang="ru-RU">
+              <a:solidFill>
+                <a:srgbClr val="000000"/>
+              </a:solidFill>
+              <a:ea typeface="+mn-lt"/>
+              <a:cs typeface="+mn-lt"/>
+            </a:endParaRPr>
+          </a:p>
+          <a:p>
+            <a:pPr algn="ctr"/>
+            <a:endParaRPr lang="ru-RU" sz="1600" dirty="0">
+              <a:solidFill>
+                <a:srgbClr val="323336"/>
+              </a:solidFill>
+              <a:ea typeface="+mn-lt"/>
+              <a:cs typeface="+mn-lt"/>
+            </a:endParaRPr>
+          </a:p>
+          <a:p>
+            <a:pPr algn="ctr"/>
+            <a:r>
+              <a:rPr lang="ru-RU" sz="1600">
+                <a:solidFill>
+                  <a:srgbClr val="323336"/>
+                </a:solidFill>
+                <a:ea typeface="+mn-lt"/>
+                <a:cs typeface="+mn-lt"/>
+              </a:rPr>
+              <a:t>• загрузку изображений блюд</a:t>
+            </a:r>
+            <a:endParaRPr lang="ru-RU">
+              <a:ea typeface="+mn-lt"/>
+              <a:cs typeface="+mn-lt"/>
+            </a:endParaRPr>
+          </a:p>
+          <a:p>
+            <a:pPr algn="ctr"/>
+            <a:endParaRPr lang="ru-RU" sz="1600" dirty="0">
+              <a:solidFill>
+                <a:srgbClr val="323336"/>
+              </a:solidFill>
+              <a:ea typeface="+mn-lt"/>
+              <a:cs typeface="+mn-lt"/>
+            </a:endParaRPr>
+          </a:p>
+          <a:p>
+            <a:pPr algn="ctr"/>
+            <a:r>
+              <a:rPr lang="ru-RU" sz="1600" dirty="0">
+                <a:solidFill>
+                  <a:srgbClr val="323336"/>
+                </a:solidFill>
+                <a:ea typeface="+mn-lt"/>
+                <a:cs typeface="+mn-lt"/>
+              </a:rPr>
+              <a:t>• систему лайков, просмотров и </a:t>
+            </a:r>
+            <a:r>
+              <a:rPr lang="ru-RU" sz="1600">
+                <a:solidFill>
+                  <a:srgbClr val="323336"/>
+                </a:solidFill>
+                <a:ea typeface="+mn-lt"/>
+                <a:cs typeface="+mn-lt"/>
+              </a:rPr>
+              <a:t>комментариев</a:t>
+            </a:r>
+            <a:endParaRPr lang="ru-RU">
+              <a:solidFill>
+                <a:srgbClr val="000000"/>
+              </a:solidFill>
+              <a:ea typeface="+mn-lt"/>
+              <a:cs typeface="+mn-lt"/>
+            </a:endParaRPr>
+          </a:p>
+          <a:p>
+            <a:pPr algn="ctr"/>
+            <a:endParaRPr lang="ru-RU" sz="1600" dirty="0">
+              <a:solidFill>
+                <a:srgbClr val="323336"/>
+              </a:solidFill>
+              <a:ea typeface="+mn-lt"/>
+              <a:cs typeface="+mn-lt"/>
+            </a:endParaRPr>
+          </a:p>
+          <a:p>
+            <a:pPr algn="ctr"/>
+            <a:r>
+              <a:rPr lang="ru-RU" sz="1600">
+                <a:solidFill>
+                  <a:srgbClr val="323336"/>
+                </a:solidFill>
+                <a:ea typeface="+mn-lt"/>
+                <a:cs typeface="+mn-lt"/>
+              </a:rPr>
+              <a:t>• подписки на других пользователей</a:t>
+            </a:r>
+            <a:endParaRPr lang="ru-RU"/>
+          </a:p>
+          <a:p>
+            <a:pPr algn="ctr"/>
+            <a:endParaRPr lang="ru-RU" sz="1600" dirty="0">
+              <a:solidFill>
+                <a:srgbClr val="323336"/>
+              </a:solidFill>
+              <a:ea typeface="+mn-lt"/>
+              <a:cs typeface="+mn-lt"/>
+            </a:endParaRPr>
+          </a:p>
+          <a:p>
+            <a:pPr algn="ctr"/>
+            <a:r>
+              <a:rPr lang="ru-RU" sz="1600" dirty="0">
+                <a:solidFill>
+                  <a:srgbClr val="323336"/>
+                </a:solidFill>
+                <a:ea typeface="+mn-lt"/>
+                <a:cs typeface="+mn-lt"/>
+              </a:rPr>
+              <a:t>• встроенный чат между </a:t>
+            </a:r>
+            <a:r>
+              <a:rPr lang="ru-RU" sz="1600">
+                <a:solidFill>
+                  <a:srgbClr val="323336"/>
+                </a:solidFill>
+                <a:ea typeface="+mn-lt"/>
+                <a:cs typeface="+mn-lt"/>
+              </a:rPr>
+              <a:t>пользователями</a:t>
+            </a:r>
+            <a:endParaRPr lang="ru-RU">
+              <a:solidFill>
+                <a:srgbClr val="000000"/>
+              </a:solidFill>
+              <a:ea typeface="+mn-lt"/>
+              <a:cs typeface="+mn-lt"/>
+            </a:endParaRPr>
+          </a:p>
+          <a:p>
+            <a:pPr algn="ctr"/>
+            <a:endParaRPr lang="ru-RU" sz="1600" dirty="0">
+              <a:solidFill>
+                <a:srgbClr val="323336"/>
+              </a:solidFill>
+              <a:ea typeface="+mn-lt"/>
+              <a:cs typeface="+mn-lt"/>
+            </a:endParaRPr>
+          </a:p>
+          <a:p>
+            <a:pPr algn="ctr"/>
+            <a:r>
+              <a:rPr lang="ru-RU" sz="1600">
+                <a:solidFill>
+                  <a:srgbClr val="323336"/>
+                </a:solidFill>
+                <a:ea typeface="+mn-lt"/>
+                <a:cs typeface="+mn-lt"/>
+              </a:rPr>
+              <a:t>• поиск рецептов и пользователей</a:t>
+            </a:r>
+            <a:endParaRPr lang="ru-RU">
+              <a:ea typeface="+mn-lt"/>
+              <a:cs typeface="+mn-lt"/>
+            </a:endParaRPr>
+          </a:p>
+          <a:p>
+            <a:pPr algn="ctr"/>
+            <a:endParaRPr lang="ru-RU" sz="1600" dirty="0">
+              <a:solidFill>
+                <a:srgbClr val="323336"/>
+              </a:solidFill>
+              <a:ea typeface="+mn-lt"/>
+              <a:cs typeface="+mn-lt"/>
+            </a:endParaRPr>
+          </a:p>
+          <a:p>
+            <a:pPr algn="ctr"/>
+            <a:r>
+              <a:rPr lang="ru-RU" sz="1600" dirty="0">
+                <a:solidFill>
+                  <a:srgbClr val="323336"/>
+                </a:solidFill>
+                <a:ea typeface="+mn-lt"/>
+                <a:cs typeface="+mn-lt"/>
+              </a:rPr>
+              <a:t>• фильтрацию рецептов по категориям и </a:t>
+            </a:r>
+            <a:r>
+              <a:rPr lang="ru-RU" sz="1600">
+                <a:solidFill>
+                  <a:srgbClr val="323336"/>
+                </a:solidFill>
+                <a:ea typeface="+mn-lt"/>
+                <a:cs typeface="+mn-lt"/>
+              </a:rPr>
+              <a:t>параметрам</a:t>
+            </a:r>
+            <a:endParaRPr lang="ru-RU">
+              <a:ea typeface="+mn-lt"/>
+              <a:cs typeface="+mn-lt"/>
+            </a:endParaRPr>
+          </a:p>
+          <a:p>
+            <a:pPr algn="ctr"/>
+            <a:endParaRPr lang="ru-RU" sz="1600" dirty="0">
+              <a:solidFill>
+                <a:srgbClr val="323336"/>
+              </a:solidFill>
+              <a:ea typeface="+mn-lt"/>
+              <a:cs typeface="+mn-lt"/>
+            </a:endParaRPr>
+          </a:p>
+          <a:p>
+            <a:pPr algn="ctr"/>
+            <a:r>
+              <a:rPr lang="ru-RU" sz="1600" dirty="0">
+                <a:solidFill>
+                  <a:srgbClr val="323336"/>
+                </a:solidFill>
+                <a:ea typeface="+mn-lt"/>
+                <a:cs typeface="+mn-lt"/>
+              </a:rPr>
+              <a:t>• адаптивную структуру интерфейса и </a:t>
+            </a:r>
+            <a:r>
+              <a:rPr lang="ru-RU" sz="1600">
+                <a:solidFill>
+                  <a:srgbClr val="323336"/>
+                </a:solidFill>
+                <a:ea typeface="+mn-lt"/>
+                <a:cs typeface="+mn-lt"/>
+              </a:rPr>
+              <a:t>разделение логики по модулям</a:t>
+            </a:r>
+            <a:endParaRPr lang="ru-RU">
+              <a:ea typeface="+mn-lt"/>
+              <a:cs typeface="+mn-lt"/>
+            </a:endParaRPr>
+          </a:p>
+          <a:p>
+            <a:pPr algn="ctr"/>
+            <a:endParaRPr lang="ru-RU" sz="1600" dirty="0">
+              <a:solidFill>
+                <a:srgbClr val="323336"/>
+              </a:solidFill>
+              <a:ea typeface="+mn-lt"/>
+              <a:cs typeface="+mn-lt"/>
+            </a:endParaRPr>
+          </a:p>
+          <a:p>
+            <a:pPr algn="l"/>
+            <a:endParaRPr lang="ru-RU" dirty="0"/>
+          </a:p>
+        </p:txBody>
+      </p:sp>
+    </p:spTree>
+    <p:extLst>
+      <p:ext uri="{BB962C8B-B14F-4D97-AF65-F5344CB8AC3E}">
+        <p14:creationId xmlns:p14="http://schemas.microsoft.com/office/powerpoint/2010/main" val="2209528851"/>
+      </p:ext>
+    </p:extLst>
+  </p:cSld>
+  <p:clrMapOvr>
+    <a:masterClrMapping/>
+  </p:clrMapOvr>
+</p:sld>
+</file>
+
+<file path=ppt/slides/slide11.xml><?xml version="1.0" encoding="utf-8"?>
+<p:sld xmlns:a="http://schemas.openxmlformats.org/drawingml/2006/main" xmlns:r="http://schemas.openxmlformats.org/officeDocument/2006/relationships" xmlns:p="http://schemas.openxmlformats.org/presentationml/2006/main">
+  <p:cSld>
+    <p:spTree>
+      <p:nvGrpSpPr>
+        <p:cNvPr id="1" name="">
+          <a:extLst>
+            <a:ext uri="{FF2B5EF4-FFF2-40B4-BE49-F238E27FC236}">
+              <a16:creationId xmlns:a16="http://schemas.microsoft.com/office/drawing/2014/main" id="{F433BDEB-007B-ABB8-DD05-D9486AD48777}"/>
+            </a:ext>
+          </a:extLst>
+        </p:cNvPr>
+        <p:cNvGrpSpPr/>
+        <p:nvPr/>
+      </p:nvGrpSpPr>
+      <p:grpSpPr>
+        <a:xfrm>
+          <a:off x="0" y="0"/>
+          <a:ext cx="0" cy="0"/>
+          <a:chOff x="0" y="0"/>
+          <a:chExt cx="0" cy="0"/>
+        </a:xfrm>
+      </p:grpSpPr>
+      <p:sp>
+        <p:nvSpPr>
+          <p:cNvPr id="3" name="Прямоугольник: скругленные углы 2">
+            <a:extLst>
+              <a:ext uri="{FF2B5EF4-FFF2-40B4-BE49-F238E27FC236}">
+                <a16:creationId xmlns:a16="http://schemas.microsoft.com/office/drawing/2014/main" id="{2652BD49-9AAC-FFA8-7B68-D7A5114BAC69}"/>
+              </a:ext>
+            </a:extLst>
+          </p:cNvPr>
+          <p:cNvSpPr/>
+          <p:nvPr/>
+        </p:nvSpPr>
+        <p:spPr>
+          <a:xfrm>
+            <a:off x="4146603" y="216088"/>
+            <a:ext cx="3898204" cy="6402676"/>
+          </a:xfrm>
+          <a:prstGeom prst="roundRect">
+            <a:avLst/>
+          </a:prstGeom>
+          <a:solidFill>
+            <a:srgbClr val="EDE8ED"/>
+          </a:solidFill>
+          <a:ln>
+            <a:solidFill>
+              <a:srgbClr val="EDE8ED"/>
+            </a:solidFill>
+          </a:ln>
+        </p:spPr>
+        <p:style>
+          <a:lnRef idx="2">
+            <a:schemeClr val="accent1">
+              <a:shade val="15000"/>
+            </a:schemeClr>
+          </a:lnRef>
+          <a:fillRef idx="1">
+            <a:schemeClr val="accent1"/>
+          </a:fillRef>
+          <a:effectRef idx="0">
+            <a:schemeClr val="accent1"/>
+          </a:effectRef>
+          <a:fontRef idx="minor">
+            <a:schemeClr val="lt1"/>
+          </a:fontRef>
+        </p:style>
+        <p:txBody>
+          <a:bodyPr lIns="91440" tIns="45720" rIns="91440" bIns="45720" rtlCol="0" anchor="ctr"/>
+          <a:lstStyle/>
+          <a:p>
+            <a:pPr algn="ctr"/>
+            <a:endParaRPr lang="ru-RU" dirty="0"/>
+          </a:p>
+        </p:txBody>
+      </p:sp>
+      <p:sp>
+        <p:nvSpPr>
+          <p:cNvPr id="4" name="TextBox 3">
+            <a:extLst>
+              <a:ext uri="{FF2B5EF4-FFF2-40B4-BE49-F238E27FC236}">
+                <a16:creationId xmlns:a16="http://schemas.microsoft.com/office/drawing/2014/main" id="{2CB56C01-AC43-EEFA-6269-523E4C342A6A}"/>
+              </a:ext>
+            </a:extLst>
+          </p:cNvPr>
+          <p:cNvSpPr txBox="1"/>
+          <p:nvPr/>
+        </p:nvSpPr>
+        <p:spPr>
+          <a:xfrm>
+            <a:off x="4146467" y="332110"/>
+            <a:ext cx="3901043" cy="6524863"/>
+          </a:xfrm>
+          <a:prstGeom prst="rect">
+            <a:avLst/>
+          </a:prstGeom>
+          <a:noFill/>
+        </p:spPr>
+        <p:txBody>
+          <a:bodyPr rot="0" spcFirstLastPara="0" vertOverflow="overflow" horzOverflow="overflow" vert="horz" wrap="square" lIns="91440" tIns="45720" rIns="91440" bIns="45720" numCol="1" spcCol="0" rtlCol="0" fromWordArt="0" anchor="ctr" anchorCtr="0" forceAA="0" compatLnSpc="1">
+            <a:prstTxWarp prst="textNoShape">
+              <a:avLst/>
+            </a:prstTxWarp>
+            <a:spAutoFit/>
+          </a:bodyPr>
+          <a:lstStyle/>
+          <a:p>
+            <a:pPr algn="ctr"/>
+            <a:r>
+              <a:rPr lang="ru-RU" sz="1600">
+                <a:solidFill>
+                  <a:srgbClr val="323336"/>
+                </a:solidFill>
+                <a:ea typeface="+mn-lt"/>
+                <a:cs typeface="+mn-lt"/>
+              </a:rPr>
+              <a:t>Основная логика приложения реализована в файле main.py, где находятся маршруты Flask, обработка запросов и взаимодействие с базой данных.</a:t>
+            </a:r>
+            <a:endParaRPr lang="ru-RU"/>
+          </a:p>
+          <a:p>
+            <a:pPr algn="ctr"/>
+            <a:endParaRPr lang="ru-RU" sz="1600" dirty="0">
+              <a:solidFill>
+                <a:srgbClr val="323336"/>
+              </a:solidFill>
+              <a:ea typeface="+mn-lt"/>
+              <a:cs typeface="+mn-lt"/>
+            </a:endParaRPr>
+          </a:p>
+          <a:p>
+            <a:pPr algn="ctr"/>
+            <a:r>
+              <a:rPr lang="ru-RU" sz="1600">
+                <a:solidFill>
+                  <a:srgbClr val="323336"/>
+                </a:solidFill>
+                <a:ea typeface="+mn-lt"/>
+                <a:cs typeface="+mn-lt"/>
+              </a:rPr>
+              <a:t>Для работы с данными используется отдельный пакет data, содержащий классы моделей:</a:t>
+            </a:r>
+          </a:p>
+          <a:p>
+            <a:pPr algn="ctr"/>
+            <a:r>
+              <a:rPr lang="ru-RU" sz="1600">
+                <a:solidFill>
+                  <a:srgbClr val="323336"/>
+                </a:solidFill>
+                <a:ea typeface="+mn-lt"/>
+                <a:cs typeface="+mn-lt"/>
+              </a:rPr>
+              <a:t>User — хранение информации о пользователях, авторизация и работа с паролями;</a:t>
+            </a:r>
+          </a:p>
+          <a:p>
+            <a:pPr algn="ctr"/>
+            <a:r>
+              <a:rPr lang="ru-RU" sz="1600">
+                <a:solidFill>
+                  <a:srgbClr val="323336"/>
+                </a:solidFill>
+                <a:ea typeface="+mn-lt"/>
+                <a:cs typeface="+mn-lt"/>
+              </a:rPr>
+              <a:t>Recipe — хранение рецептов, ингредиентов, изображений и характеристик блюда;</a:t>
+            </a:r>
+          </a:p>
+          <a:p>
+            <a:pPr algn="ctr"/>
+            <a:r>
+              <a:rPr lang="ru-RU" sz="1600">
+                <a:solidFill>
+                  <a:srgbClr val="323336"/>
+                </a:solidFill>
+                <a:ea typeface="+mn-lt"/>
+                <a:cs typeface="+mn-lt"/>
+              </a:rPr>
+              <a:t>Comment — система комментариев и ответов;</a:t>
+            </a:r>
+          </a:p>
+          <a:p>
+            <a:pPr algn="ctr"/>
+            <a:r>
+              <a:rPr lang="ru-RU" sz="1600">
+                <a:solidFill>
+                  <a:srgbClr val="323336"/>
+                </a:solidFill>
+                <a:ea typeface="+mn-lt"/>
+                <a:cs typeface="+mn-lt"/>
+              </a:rPr>
+              <a:t>Like — обработка лайков;</a:t>
+            </a:r>
+          </a:p>
+          <a:p>
+            <a:pPr algn="ctr"/>
+            <a:r>
+              <a:rPr lang="ru-RU" sz="1600">
+                <a:solidFill>
+                  <a:srgbClr val="323336"/>
+                </a:solidFill>
+                <a:ea typeface="+mn-lt"/>
+                <a:cs typeface="+mn-lt"/>
+              </a:rPr>
+              <a:t>Subscription — подписки между пользователями;</a:t>
+            </a:r>
+          </a:p>
+          <a:p>
+            <a:pPr algn="ctr"/>
+            <a:r>
+              <a:rPr lang="ru-RU" sz="1600">
+                <a:solidFill>
+                  <a:srgbClr val="323336"/>
+                </a:solidFill>
+                <a:ea typeface="+mn-lt"/>
+                <a:cs typeface="+mn-lt"/>
+              </a:rPr>
+              <a:t>Message — личные сообщения и чат;</a:t>
+            </a:r>
+          </a:p>
+          <a:p>
+            <a:pPr algn="ctr"/>
+            <a:r>
+              <a:rPr lang="ru-RU" sz="1600">
+                <a:solidFill>
+                  <a:srgbClr val="323336"/>
+                </a:solidFill>
+                <a:ea typeface="+mn-lt"/>
+                <a:cs typeface="+mn-lt"/>
+              </a:rPr>
+              <a:t>View — учёт просмотров рецептов;</a:t>
+            </a:r>
+          </a:p>
+          <a:p>
+            <a:pPr algn="ctr"/>
+            <a:r>
+              <a:rPr lang="ru-RU" sz="1600">
+                <a:solidFill>
+                  <a:srgbClr val="323336"/>
+                </a:solidFill>
+                <a:ea typeface="+mn-lt"/>
+                <a:cs typeface="+mn-lt"/>
+              </a:rPr>
+              <a:t>db_session — настройка подключения к базе данных и создание сессий SQLAlchemy.</a:t>
+            </a:r>
+          </a:p>
+          <a:p>
+            <a:pPr algn="l"/>
+            <a:endParaRPr lang="ru-RU" dirty="0"/>
+          </a:p>
+        </p:txBody>
+      </p:sp>
+      <p:sp>
+        <p:nvSpPr>
+          <p:cNvPr id="6" name="Прямоугольник: скругленные углы 5">
+            <a:extLst>
+              <a:ext uri="{FF2B5EF4-FFF2-40B4-BE49-F238E27FC236}">
+                <a16:creationId xmlns:a16="http://schemas.microsoft.com/office/drawing/2014/main" id="{D73A5B26-F93A-742F-6D1D-AFCA50E0A993}"/>
+              </a:ext>
+            </a:extLst>
+          </p:cNvPr>
+          <p:cNvSpPr/>
+          <p:nvPr/>
+        </p:nvSpPr>
+        <p:spPr>
+          <a:xfrm>
+            <a:off x="-4106748" y="176504"/>
+            <a:ext cx="3898204" cy="6402676"/>
+          </a:xfrm>
+          <a:prstGeom prst="roundRect">
+            <a:avLst/>
+          </a:prstGeom>
+          <a:solidFill>
+            <a:srgbClr val="EDE8ED"/>
+          </a:solidFill>
+          <a:ln>
+            <a:solidFill>
+              <a:srgbClr val="EDE8ED"/>
+            </a:solidFill>
+          </a:ln>
+        </p:spPr>
+        <p:style>
+          <a:lnRef idx="2">
+            <a:schemeClr val="accent1">
+              <a:shade val="15000"/>
+            </a:schemeClr>
+          </a:lnRef>
+          <a:fillRef idx="1">
+            <a:schemeClr val="accent1"/>
+          </a:fillRef>
+          <a:effectRef idx="0">
+            <a:schemeClr val="accent1"/>
+          </a:effectRef>
+          <a:fontRef idx="minor">
+            <a:schemeClr val="lt1"/>
+          </a:fontRef>
+        </p:style>
+        <p:txBody>
+          <a:bodyPr lIns="91440" tIns="45720" rIns="91440" bIns="45720" rtlCol="0" anchor="ctr"/>
+          <a:lstStyle/>
+          <a:p>
+            <a:pPr algn="ctr"/>
+            <a:endParaRPr lang="ru-RU" dirty="0"/>
+          </a:p>
+        </p:txBody>
+      </p:sp>
+      <p:sp>
+        <p:nvSpPr>
+          <p:cNvPr id="7" name="Прямоугольник: скругленные углы 6">
+            <a:extLst>
+              <a:ext uri="{FF2B5EF4-FFF2-40B4-BE49-F238E27FC236}">
+                <a16:creationId xmlns:a16="http://schemas.microsoft.com/office/drawing/2014/main" id="{99B13B2E-6BAF-36FB-561F-8BD419A73C1E}"/>
+              </a:ext>
+            </a:extLst>
+          </p:cNvPr>
+          <p:cNvSpPr/>
+          <p:nvPr/>
+        </p:nvSpPr>
+        <p:spPr>
+          <a:xfrm>
+            <a:off x="8184213" y="216087"/>
+            <a:ext cx="3898204" cy="6402676"/>
+          </a:xfrm>
+          <a:prstGeom prst="roundRect">
+            <a:avLst/>
+          </a:prstGeom>
+          <a:solidFill>
+            <a:srgbClr val="EDE8ED"/>
+          </a:solidFill>
+          <a:ln>
+            <a:solidFill>
+              <a:srgbClr val="EDE8ED"/>
+            </a:solidFill>
+          </a:ln>
+        </p:spPr>
+        <p:style>
+          <a:lnRef idx="2">
+            <a:schemeClr val="accent1">
+              <a:shade val="15000"/>
+            </a:schemeClr>
+          </a:lnRef>
+          <a:fillRef idx="1">
+            <a:schemeClr val="accent1"/>
+          </a:fillRef>
+          <a:effectRef idx="0">
+            <a:schemeClr val="accent1"/>
+          </a:effectRef>
+          <a:fontRef idx="minor">
+            <a:schemeClr val="lt1"/>
+          </a:fontRef>
+        </p:style>
+        <p:txBody>
+          <a:bodyPr lIns="91440" tIns="45720" rIns="91440" bIns="45720" rtlCol="0" anchor="ctr"/>
+          <a:lstStyle/>
+          <a:p>
+            <a:pPr algn="ctr"/>
+            <a:endParaRPr lang="ru-RU" dirty="0"/>
+          </a:p>
+        </p:txBody>
+      </p:sp>
+      <p:sp>
+        <p:nvSpPr>
+          <p:cNvPr id="9" name="TextBox 8">
+            <a:extLst>
+              <a:ext uri="{FF2B5EF4-FFF2-40B4-BE49-F238E27FC236}">
+                <a16:creationId xmlns:a16="http://schemas.microsoft.com/office/drawing/2014/main" id="{AD9BE99F-B339-DCE7-241D-A1F75FD163D6}"/>
+              </a:ext>
+            </a:extLst>
+          </p:cNvPr>
+          <p:cNvSpPr txBox="1"/>
+          <p:nvPr/>
+        </p:nvSpPr>
+        <p:spPr>
+          <a:xfrm>
+            <a:off x="-4106884" y="172593"/>
+            <a:ext cx="3901043" cy="6278642"/>
+          </a:xfrm>
+          <a:prstGeom prst="rect">
+            <a:avLst/>
+          </a:prstGeom>
+          <a:noFill/>
+        </p:spPr>
+        <p:txBody>
+          <a:bodyPr rot="0" spcFirstLastPara="0" vertOverflow="overflow" horzOverflow="overflow" vert="horz" wrap="square" lIns="91440" tIns="45720" rIns="91440" bIns="45720" numCol="1" spcCol="0" rtlCol="0" fromWordArt="0" anchor="ctr" anchorCtr="0" forceAA="0" compatLnSpc="1">
+            <a:prstTxWarp prst="textNoShape">
+              <a:avLst/>
+            </a:prstTxWarp>
+            <a:spAutoFit/>
+          </a:bodyPr>
+          <a:lstStyle/>
+          <a:p>
+            <a:pPr algn="ctr"/>
+            <a:endParaRPr lang="ru-RU" sz="1600" dirty="0">
+              <a:solidFill>
+                <a:srgbClr val="323336"/>
+              </a:solidFill>
+            </a:endParaRPr>
+          </a:p>
+          <a:p>
+            <a:pPr algn="ctr"/>
+            <a:r>
+              <a:rPr lang="ru-RU" sz="1600">
+                <a:solidFill>
+                  <a:srgbClr val="323336"/>
+                </a:solidFill>
+                <a:ea typeface="+mn-lt"/>
+                <a:cs typeface="+mn-lt"/>
+              </a:rPr>
+              <a:t>При разработке проекта использовались следующие технологии:</a:t>
+            </a:r>
+            <a:endParaRPr lang="ru-RU">
+              <a:ea typeface="+mn-lt"/>
+              <a:cs typeface="+mn-lt"/>
+            </a:endParaRPr>
+          </a:p>
+          <a:p>
+            <a:pPr algn="ctr"/>
+            <a:endParaRPr lang="ru-RU" sz="1600" dirty="0">
+              <a:solidFill>
+                <a:srgbClr val="323336"/>
+              </a:solidFill>
+              <a:ea typeface="+mn-lt"/>
+              <a:cs typeface="+mn-lt"/>
+            </a:endParaRPr>
+          </a:p>
+          <a:p>
+            <a:pPr algn="ctr"/>
+            <a:r>
+              <a:rPr lang="ru-RU" sz="1600">
+                <a:solidFill>
+                  <a:srgbClr val="323336"/>
+                </a:solidFill>
+                <a:ea typeface="+mn-lt"/>
+                <a:cs typeface="+mn-lt"/>
+              </a:rPr>
+              <a:t>Python — основной язык разработки</a:t>
+            </a:r>
+            <a:endParaRPr lang="ru-RU">
+              <a:solidFill>
+                <a:srgbClr val="000000"/>
+              </a:solidFill>
+              <a:ea typeface="+mn-lt"/>
+              <a:cs typeface="+mn-lt"/>
+            </a:endParaRPr>
+          </a:p>
+          <a:p>
+            <a:pPr algn="ctr"/>
+            <a:endParaRPr lang="ru-RU" sz="1600" dirty="0">
+              <a:solidFill>
+                <a:srgbClr val="323336"/>
+              </a:solidFill>
+            </a:endParaRPr>
+          </a:p>
+          <a:p>
+            <a:pPr algn="ctr"/>
+            <a:r>
+              <a:rPr lang="ru-RU" sz="1600" dirty="0">
+                <a:solidFill>
+                  <a:srgbClr val="323336"/>
+                </a:solidFill>
+                <a:ea typeface="+mn-lt"/>
+                <a:cs typeface="+mn-lt"/>
+              </a:rPr>
+              <a:t>Flask — создание веб-приложения и </a:t>
+            </a:r>
+            <a:r>
+              <a:rPr lang="ru-RU" sz="1600">
+                <a:solidFill>
+                  <a:srgbClr val="323336"/>
+                </a:solidFill>
+                <a:ea typeface="+mn-lt"/>
+                <a:cs typeface="+mn-lt"/>
+              </a:rPr>
+              <a:t>маршрутизации</a:t>
+            </a:r>
+            <a:endParaRPr lang="ru-RU">
+              <a:solidFill>
+                <a:srgbClr val="000000"/>
+              </a:solidFill>
+              <a:ea typeface="+mn-lt"/>
+              <a:cs typeface="+mn-lt"/>
+            </a:endParaRPr>
+          </a:p>
+          <a:p>
+            <a:pPr algn="ctr"/>
+            <a:endParaRPr lang="ru-RU" sz="1600" dirty="0">
+              <a:solidFill>
+                <a:srgbClr val="323336"/>
+              </a:solidFill>
+            </a:endParaRPr>
+          </a:p>
+          <a:p>
+            <a:pPr algn="ctr"/>
+            <a:r>
+              <a:rPr lang="ru-RU" sz="1600" dirty="0">
+                <a:solidFill>
+                  <a:srgbClr val="323336"/>
+                </a:solidFill>
+                <a:ea typeface="+mn-lt"/>
+                <a:cs typeface="+mn-lt"/>
+              </a:rPr>
+              <a:t>SQLAlchemy — работа с базой данных </a:t>
+            </a:r>
+            <a:r>
+              <a:rPr lang="ru-RU" sz="1600">
+                <a:solidFill>
+                  <a:srgbClr val="323336"/>
+                </a:solidFill>
+                <a:ea typeface="+mn-lt"/>
+                <a:cs typeface="+mn-lt"/>
+              </a:rPr>
+              <a:t>через ORM</a:t>
+            </a:r>
+            <a:endParaRPr lang="ru-RU">
+              <a:solidFill>
+                <a:srgbClr val="000000"/>
+              </a:solidFill>
+              <a:ea typeface="+mn-lt"/>
+              <a:cs typeface="+mn-lt"/>
+            </a:endParaRPr>
+          </a:p>
+          <a:p>
+            <a:pPr algn="ctr"/>
+            <a:endParaRPr lang="ru-RU" sz="1600" dirty="0">
+              <a:solidFill>
+                <a:srgbClr val="323336"/>
+              </a:solidFill>
+              <a:ea typeface="+mn-lt"/>
+              <a:cs typeface="+mn-lt"/>
+            </a:endParaRPr>
+          </a:p>
+          <a:p>
+            <a:pPr algn="ctr"/>
+            <a:r>
+              <a:rPr lang="ru-RU" sz="1600">
+                <a:solidFill>
+                  <a:srgbClr val="323336"/>
+                </a:solidFill>
+                <a:ea typeface="+mn-lt"/>
+                <a:cs typeface="+mn-lt"/>
+              </a:rPr>
+              <a:t>SQLite — хранение данных приложения</a:t>
+            </a:r>
+            <a:endParaRPr lang="ru-RU">
+              <a:solidFill>
+                <a:srgbClr val="000000"/>
+              </a:solidFill>
+              <a:ea typeface="+mn-lt"/>
+              <a:cs typeface="+mn-lt"/>
+            </a:endParaRPr>
+          </a:p>
+          <a:p>
+            <a:pPr algn="ctr"/>
+            <a:endParaRPr lang="ru-RU" sz="1600" dirty="0">
+              <a:solidFill>
+                <a:srgbClr val="323336"/>
+              </a:solidFill>
+              <a:ea typeface="+mn-lt"/>
+              <a:cs typeface="+mn-lt"/>
+            </a:endParaRPr>
+          </a:p>
+          <a:p>
+            <a:pPr algn="ctr"/>
+            <a:r>
+              <a:rPr lang="ru-RU" sz="1600" dirty="0">
+                <a:solidFill>
+                  <a:srgbClr val="323336"/>
+                </a:solidFill>
+                <a:ea typeface="+mn-lt"/>
+                <a:cs typeface="+mn-lt"/>
+              </a:rPr>
+              <a:t>Flask-Login — система регистрации и </a:t>
+            </a:r>
+            <a:r>
+              <a:rPr lang="ru-RU" sz="1600">
+                <a:solidFill>
+                  <a:srgbClr val="323336"/>
+                </a:solidFill>
+                <a:ea typeface="+mn-lt"/>
+                <a:cs typeface="+mn-lt"/>
+              </a:rPr>
+              <a:t>авторизации пользователей</a:t>
+            </a:r>
+            <a:endParaRPr lang="ru-RU">
+              <a:solidFill>
+                <a:srgbClr val="000000"/>
+              </a:solidFill>
+              <a:ea typeface="+mn-lt"/>
+              <a:cs typeface="+mn-lt"/>
+            </a:endParaRPr>
+          </a:p>
+          <a:p>
+            <a:pPr algn="ctr"/>
+            <a:endParaRPr lang="ru-RU" sz="1600" dirty="0">
+              <a:solidFill>
+                <a:srgbClr val="323336"/>
+              </a:solidFill>
+              <a:ea typeface="+mn-lt"/>
+              <a:cs typeface="+mn-lt"/>
+            </a:endParaRPr>
+          </a:p>
+          <a:p>
+            <a:pPr algn="ctr"/>
+            <a:r>
+              <a:rPr lang="ru-RU" sz="1600" dirty="0">
+                <a:solidFill>
+                  <a:srgbClr val="323336"/>
+                </a:solidFill>
+                <a:ea typeface="+mn-lt"/>
+                <a:cs typeface="+mn-lt"/>
+              </a:rPr>
+              <a:t>Pillow — обработка и оптимизация </a:t>
+            </a:r>
+            <a:r>
+              <a:rPr lang="ru-RU" sz="1600">
+                <a:solidFill>
+                  <a:srgbClr val="323336"/>
+                </a:solidFill>
+                <a:ea typeface="+mn-lt"/>
+                <a:cs typeface="+mn-lt"/>
+              </a:rPr>
+              <a:t>изображений</a:t>
+            </a:r>
+            <a:endParaRPr lang="ru-RU">
+              <a:ea typeface="+mn-lt"/>
+              <a:cs typeface="+mn-lt"/>
+            </a:endParaRPr>
+          </a:p>
+          <a:p>
+            <a:pPr algn="ctr"/>
+            <a:endParaRPr lang="ru-RU" sz="1600" dirty="0">
+              <a:solidFill>
+                <a:srgbClr val="323336"/>
+              </a:solidFill>
+              <a:ea typeface="+mn-lt"/>
+              <a:cs typeface="+mn-lt"/>
+            </a:endParaRPr>
+          </a:p>
+          <a:p>
+            <a:pPr algn="ctr"/>
+            <a:r>
+              <a:rPr lang="ru-RU" sz="1600" dirty="0">
+                <a:solidFill>
+                  <a:srgbClr val="323336"/>
+                </a:solidFill>
+                <a:ea typeface="+mn-lt"/>
+                <a:cs typeface="+mn-lt"/>
+              </a:rPr>
+              <a:t>HTML, CSS и Jinja2 — создание </a:t>
+            </a:r>
+            <a:r>
+              <a:rPr lang="ru-RU" sz="1600">
+                <a:solidFill>
+                  <a:srgbClr val="323336"/>
+                </a:solidFill>
+                <a:ea typeface="+mn-lt"/>
+                <a:cs typeface="+mn-lt"/>
+              </a:rPr>
+              <a:t>пользовательского интерфейса</a:t>
+            </a:r>
+            <a:endParaRPr lang="ru-RU">
+              <a:ea typeface="+mn-lt"/>
+              <a:cs typeface="+mn-lt"/>
+            </a:endParaRPr>
+          </a:p>
+          <a:p>
+            <a:pPr algn="ctr"/>
+            <a:endParaRPr lang="ru-RU" sz="1600" dirty="0">
+              <a:solidFill>
+                <a:srgbClr val="323336"/>
+              </a:solidFill>
+              <a:ea typeface="+mn-lt"/>
+              <a:cs typeface="+mn-lt"/>
+            </a:endParaRPr>
+          </a:p>
+          <a:p>
+            <a:pPr algn="l"/>
+            <a:endParaRPr lang="ru-RU" dirty="0"/>
+          </a:p>
+        </p:txBody>
+      </p:sp>
+      <p:sp>
+        <p:nvSpPr>
+          <p:cNvPr id="10" name="TextBox 9">
+            <a:extLst>
+              <a:ext uri="{FF2B5EF4-FFF2-40B4-BE49-F238E27FC236}">
+                <a16:creationId xmlns:a16="http://schemas.microsoft.com/office/drawing/2014/main" id="{61B1657A-A928-93CC-7B4D-A92A686931D0}"/>
+              </a:ext>
+            </a:extLst>
+          </p:cNvPr>
+          <p:cNvSpPr txBox="1"/>
+          <p:nvPr/>
+        </p:nvSpPr>
+        <p:spPr>
+          <a:xfrm>
+            <a:off x="8184076" y="223254"/>
+            <a:ext cx="3901043" cy="6771084"/>
+          </a:xfrm>
+          <a:prstGeom prst="rect">
+            <a:avLst/>
+          </a:prstGeom>
+          <a:noFill/>
+        </p:spPr>
+        <p:txBody>
+          <a:bodyPr rot="0" spcFirstLastPara="0" vertOverflow="overflow" horzOverflow="overflow" vert="horz" wrap="square" lIns="91440" tIns="45720" rIns="91440" bIns="45720" numCol="1" spcCol="0" rtlCol="0" fromWordArt="0" anchor="ctr" anchorCtr="0" forceAA="0" compatLnSpc="1">
+            <a:prstTxWarp prst="textNoShape">
+              <a:avLst/>
+            </a:prstTxWarp>
+            <a:spAutoFit/>
+          </a:bodyPr>
+          <a:lstStyle/>
+          <a:p>
+            <a:pPr algn="ctr"/>
+            <a:r>
+              <a:rPr lang="ru-RU" sz="1600">
+                <a:solidFill>
+                  <a:srgbClr val="323336"/>
+                </a:solidFill>
+                <a:ea typeface="+mn-lt"/>
+                <a:cs typeface="+mn-lt"/>
+              </a:rPr>
+              <a:t>К особенностям проекта можно отнести:</a:t>
+            </a:r>
+            <a:endParaRPr lang="ru-RU">
+              <a:ea typeface="+mn-lt"/>
+              <a:cs typeface="+mn-lt"/>
+            </a:endParaRPr>
+          </a:p>
+          <a:p>
+            <a:pPr algn="ctr"/>
+            <a:r>
+              <a:rPr lang="ru-RU" sz="1600" dirty="0">
+                <a:solidFill>
+                  <a:srgbClr val="323336"/>
+                </a:solidFill>
+                <a:ea typeface="+mn-lt"/>
+                <a:cs typeface="+mn-lt"/>
+              </a:rPr>
+              <a:t>• регистрацию и авторизацию </a:t>
+            </a:r>
+            <a:r>
+              <a:rPr lang="ru-RU" sz="1600">
+                <a:solidFill>
+                  <a:srgbClr val="323336"/>
+                </a:solidFill>
+                <a:ea typeface="+mn-lt"/>
+                <a:cs typeface="+mn-lt"/>
+              </a:rPr>
+              <a:t>пользователей</a:t>
+            </a:r>
+            <a:endParaRPr lang="ru-RU">
+              <a:ea typeface="+mn-lt"/>
+              <a:cs typeface="+mn-lt"/>
+            </a:endParaRPr>
+          </a:p>
+          <a:p>
+            <a:pPr algn="ctr"/>
+            <a:endParaRPr lang="ru-RU" sz="1600" dirty="0">
+              <a:solidFill>
+                <a:srgbClr val="323336"/>
+              </a:solidFill>
+              <a:ea typeface="+mn-lt"/>
+              <a:cs typeface="+mn-lt"/>
+            </a:endParaRPr>
+          </a:p>
+          <a:p>
+            <a:pPr algn="ctr"/>
+            <a:r>
+              <a:rPr lang="ru-RU" sz="1600" dirty="0">
+                <a:solidFill>
+                  <a:srgbClr val="323336"/>
+                </a:solidFill>
+                <a:ea typeface="+mn-lt"/>
+                <a:cs typeface="+mn-lt"/>
+              </a:rPr>
+              <a:t>• создание, редактирование и удаление </a:t>
+            </a:r>
+            <a:r>
+              <a:rPr lang="ru-RU" sz="1600">
+                <a:solidFill>
+                  <a:srgbClr val="323336"/>
+                </a:solidFill>
+                <a:ea typeface="+mn-lt"/>
+                <a:cs typeface="+mn-lt"/>
+              </a:rPr>
+              <a:t>рецептов</a:t>
+            </a:r>
+            <a:endParaRPr lang="ru-RU">
+              <a:solidFill>
+                <a:srgbClr val="000000"/>
+              </a:solidFill>
+              <a:ea typeface="+mn-lt"/>
+              <a:cs typeface="+mn-lt"/>
+            </a:endParaRPr>
+          </a:p>
+          <a:p>
+            <a:pPr algn="ctr"/>
+            <a:endParaRPr lang="ru-RU" sz="1600" dirty="0">
+              <a:solidFill>
+                <a:srgbClr val="323336"/>
+              </a:solidFill>
+              <a:ea typeface="+mn-lt"/>
+              <a:cs typeface="+mn-lt"/>
+            </a:endParaRPr>
+          </a:p>
+          <a:p>
+            <a:pPr algn="ctr"/>
+            <a:r>
+              <a:rPr lang="ru-RU" sz="1600">
+                <a:solidFill>
+                  <a:srgbClr val="323336"/>
+                </a:solidFill>
+                <a:ea typeface="+mn-lt"/>
+                <a:cs typeface="+mn-lt"/>
+              </a:rPr>
+              <a:t>• загрузку изображений блюд</a:t>
+            </a:r>
+            <a:endParaRPr lang="ru-RU">
+              <a:ea typeface="+mn-lt"/>
+              <a:cs typeface="+mn-lt"/>
+            </a:endParaRPr>
+          </a:p>
+          <a:p>
+            <a:pPr algn="ctr"/>
+            <a:endParaRPr lang="ru-RU" sz="1600" dirty="0">
+              <a:solidFill>
+                <a:srgbClr val="323336"/>
+              </a:solidFill>
+              <a:ea typeface="+mn-lt"/>
+              <a:cs typeface="+mn-lt"/>
+            </a:endParaRPr>
+          </a:p>
+          <a:p>
+            <a:pPr algn="ctr"/>
+            <a:r>
+              <a:rPr lang="ru-RU" sz="1600" dirty="0">
+                <a:solidFill>
+                  <a:srgbClr val="323336"/>
+                </a:solidFill>
+                <a:ea typeface="+mn-lt"/>
+                <a:cs typeface="+mn-lt"/>
+              </a:rPr>
+              <a:t>• систему лайков, просмотров и </a:t>
+            </a:r>
+            <a:r>
+              <a:rPr lang="ru-RU" sz="1600">
+                <a:solidFill>
+                  <a:srgbClr val="323336"/>
+                </a:solidFill>
+                <a:ea typeface="+mn-lt"/>
+                <a:cs typeface="+mn-lt"/>
+              </a:rPr>
+              <a:t>комментариев</a:t>
+            </a:r>
+            <a:endParaRPr lang="ru-RU">
+              <a:solidFill>
+                <a:srgbClr val="000000"/>
+              </a:solidFill>
+              <a:ea typeface="+mn-lt"/>
+              <a:cs typeface="+mn-lt"/>
+            </a:endParaRPr>
+          </a:p>
+          <a:p>
+            <a:pPr algn="ctr"/>
+            <a:endParaRPr lang="ru-RU" sz="1600" dirty="0">
+              <a:solidFill>
+                <a:srgbClr val="323336"/>
+              </a:solidFill>
+              <a:ea typeface="+mn-lt"/>
+              <a:cs typeface="+mn-lt"/>
+            </a:endParaRPr>
+          </a:p>
+          <a:p>
+            <a:pPr algn="ctr"/>
+            <a:r>
+              <a:rPr lang="ru-RU" sz="1600">
+                <a:solidFill>
+                  <a:srgbClr val="323336"/>
+                </a:solidFill>
+                <a:ea typeface="+mn-lt"/>
+                <a:cs typeface="+mn-lt"/>
+              </a:rPr>
+              <a:t>• подписки на других пользователей</a:t>
+            </a:r>
+            <a:endParaRPr lang="ru-RU"/>
+          </a:p>
+          <a:p>
+            <a:pPr algn="ctr"/>
+            <a:endParaRPr lang="ru-RU" sz="1600" dirty="0">
+              <a:solidFill>
+                <a:srgbClr val="323336"/>
+              </a:solidFill>
+              <a:ea typeface="+mn-lt"/>
+              <a:cs typeface="+mn-lt"/>
+            </a:endParaRPr>
+          </a:p>
+          <a:p>
+            <a:pPr algn="ctr"/>
+            <a:r>
+              <a:rPr lang="ru-RU" sz="1600" dirty="0">
+                <a:solidFill>
+                  <a:srgbClr val="323336"/>
+                </a:solidFill>
+                <a:ea typeface="+mn-lt"/>
+                <a:cs typeface="+mn-lt"/>
+              </a:rPr>
+              <a:t>• встроенный чат между </a:t>
+            </a:r>
+            <a:r>
+              <a:rPr lang="ru-RU" sz="1600">
+                <a:solidFill>
+                  <a:srgbClr val="323336"/>
+                </a:solidFill>
+                <a:ea typeface="+mn-lt"/>
+                <a:cs typeface="+mn-lt"/>
+              </a:rPr>
+              <a:t>пользователями</a:t>
+            </a:r>
+            <a:endParaRPr lang="ru-RU">
+              <a:solidFill>
+                <a:srgbClr val="000000"/>
+              </a:solidFill>
+              <a:ea typeface="+mn-lt"/>
+              <a:cs typeface="+mn-lt"/>
+            </a:endParaRPr>
+          </a:p>
+          <a:p>
+            <a:pPr algn="ctr"/>
+            <a:endParaRPr lang="ru-RU" sz="1600" dirty="0">
+              <a:solidFill>
+                <a:srgbClr val="323336"/>
+              </a:solidFill>
+              <a:ea typeface="+mn-lt"/>
+              <a:cs typeface="+mn-lt"/>
+            </a:endParaRPr>
+          </a:p>
+          <a:p>
+            <a:pPr algn="ctr"/>
+            <a:r>
+              <a:rPr lang="ru-RU" sz="1600">
+                <a:solidFill>
+                  <a:srgbClr val="323336"/>
+                </a:solidFill>
+                <a:ea typeface="+mn-lt"/>
+                <a:cs typeface="+mn-lt"/>
+              </a:rPr>
+              <a:t>• поиск рецептов и пользователей</a:t>
+            </a:r>
+            <a:endParaRPr lang="ru-RU">
+              <a:ea typeface="+mn-lt"/>
+              <a:cs typeface="+mn-lt"/>
+            </a:endParaRPr>
+          </a:p>
+          <a:p>
+            <a:pPr algn="ctr"/>
+            <a:endParaRPr lang="ru-RU" sz="1600" dirty="0">
+              <a:solidFill>
+                <a:srgbClr val="323336"/>
+              </a:solidFill>
+              <a:ea typeface="+mn-lt"/>
+              <a:cs typeface="+mn-lt"/>
+            </a:endParaRPr>
+          </a:p>
+          <a:p>
+            <a:pPr algn="ctr"/>
+            <a:r>
+              <a:rPr lang="ru-RU" sz="1600" dirty="0">
+                <a:solidFill>
+                  <a:srgbClr val="323336"/>
+                </a:solidFill>
+                <a:ea typeface="+mn-lt"/>
+                <a:cs typeface="+mn-lt"/>
+              </a:rPr>
+              <a:t>• фильтрацию рецептов по категориям и </a:t>
+            </a:r>
+            <a:r>
+              <a:rPr lang="ru-RU" sz="1600">
+                <a:solidFill>
+                  <a:srgbClr val="323336"/>
+                </a:solidFill>
+                <a:ea typeface="+mn-lt"/>
+                <a:cs typeface="+mn-lt"/>
+              </a:rPr>
+              <a:t>параметрам</a:t>
+            </a:r>
+            <a:endParaRPr lang="ru-RU">
+              <a:ea typeface="+mn-lt"/>
+              <a:cs typeface="+mn-lt"/>
+            </a:endParaRPr>
+          </a:p>
+          <a:p>
+            <a:pPr algn="ctr"/>
+            <a:endParaRPr lang="ru-RU" sz="1600" dirty="0">
+              <a:solidFill>
+                <a:srgbClr val="323336"/>
+              </a:solidFill>
+              <a:ea typeface="+mn-lt"/>
+              <a:cs typeface="+mn-lt"/>
+            </a:endParaRPr>
+          </a:p>
+          <a:p>
+            <a:pPr algn="ctr"/>
+            <a:r>
+              <a:rPr lang="ru-RU" sz="1600" dirty="0">
+                <a:solidFill>
+                  <a:srgbClr val="323336"/>
+                </a:solidFill>
+                <a:ea typeface="+mn-lt"/>
+                <a:cs typeface="+mn-lt"/>
+              </a:rPr>
+              <a:t>• адаптивную структуру интерфейса и </a:t>
+            </a:r>
+            <a:r>
+              <a:rPr lang="ru-RU" sz="1600">
+                <a:solidFill>
+                  <a:srgbClr val="323336"/>
+                </a:solidFill>
+                <a:ea typeface="+mn-lt"/>
+                <a:cs typeface="+mn-lt"/>
+              </a:rPr>
+              <a:t>разделение логики по модулям</a:t>
+            </a:r>
+            <a:endParaRPr lang="ru-RU">
+              <a:ea typeface="+mn-lt"/>
+              <a:cs typeface="+mn-lt"/>
+            </a:endParaRPr>
+          </a:p>
+          <a:p>
+            <a:pPr algn="ctr"/>
+            <a:endParaRPr lang="ru-RU" sz="1600" dirty="0">
+              <a:solidFill>
+                <a:srgbClr val="323336"/>
+              </a:solidFill>
+              <a:ea typeface="+mn-lt"/>
+              <a:cs typeface="+mn-lt"/>
+            </a:endParaRPr>
+          </a:p>
+          <a:p>
+            <a:pPr algn="l"/>
+            <a:endParaRPr lang="ru-RU" dirty="0"/>
+          </a:p>
+        </p:txBody>
+      </p:sp>
+    </p:spTree>
+    <p:extLst>
+      <p:ext uri="{BB962C8B-B14F-4D97-AF65-F5344CB8AC3E}">
+        <p14:creationId xmlns:p14="http://schemas.microsoft.com/office/powerpoint/2010/main" val="4084079780"/>
+      </p:ext>
+    </p:extLst>
+  </p:cSld>
+  <p:clrMapOvr>
+    <a:masterClrMapping/>
+  </p:clrMapOvr>
+  <mc:AlternateContent xmlns:mc="http://schemas.openxmlformats.org/markup-compatibility/2006">
+    <mc:Choice xmlns:p159="http://schemas.microsoft.com/office/powerpoint/2015/09/main" Requires="p159">
+      <p:transition xmlns:p14="http://schemas.microsoft.com/office/powerpoint/2010/main" spd="slow" p14:dur="2000">
+        <p159:morph option="byObject"/>
+      </p:transition>
+    </mc:Choice>
+    <mc:Fallback>
+      <p:transition spd="slow">
+        <p:fade/>
+      </p:transition>
+    </mc:Fallback>
+  </mc:AlternateContent>
+</p:sld>
+</file>
+
+<file path=ppt/slides/slide12.xml><?xml version="1.0" encoding="utf-8"?>
+<p:sld xmlns:a="http://schemas.openxmlformats.org/drawingml/2006/main" xmlns:r="http://schemas.openxmlformats.org/officeDocument/2006/relationships" xmlns:p="http://schemas.openxmlformats.org/presentationml/2006/main">
+  <p:cSld>
+    <p:spTree>
+      <p:nvGrpSpPr>
+        <p:cNvPr id="1" name=""/>
+        <p:cNvGrpSpPr/>
+        <p:nvPr/>
+      </p:nvGrpSpPr>
+      <p:grpSpPr>
+        <a:xfrm>
+          <a:off x="0" y="0"/>
+          <a:ext cx="0" cy="0"/>
+          <a:chOff x="0" y="0"/>
+          <a:chExt cx="0" cy="0"/>
+        </a:xfrm>
+      </p:grpSpPr>
+      <p:sp>
+        <p:nvSpPr>
+          <p:cNvPr id="3" name="Прямоугольник: скругленные углы 2">
+            <a:extLst>
+              <a:ext uri="{FF2B5EF4-FFF2-40B4-BE49-F238E27FC236}">
+                <a16:creationId xmlns:a16="http://schemas.microsoft.com/office/drawing/2014/main" id="{BE4FAA37-2007-0142-7FDE-55715A78A87B}"/>
+              </a:ext>
+            </a:extLst>
+          </p:cNvPr>
+          <p:cNvSpPr/>
+          <p:nvPr/>
+        </p:nvSpPr>
+        <p:spPr>
+          <a:xfrm>
+            <a:off x="4146603" y="216088"/>
+            <a:ext cx="3898204" cy="6402676"/>
+          </a:xfrm>
+          <a:prstGeom prst="roundRect">
+            <a:avLst/>
+          </a:prstGeom>
+          <a:solidFill>
+            <a:srgbClr val="EDE8ED"/>
+          </a:solidFill>
+          <a:ln>
+            <a:solidFill>
+              <a:srgbClr val="EDE8ED"/>
+            </a:solidFill>
+          </a:ln>
+        </p:spPr>
+        <p:style>
+          <a:lnRef idx="2">
+            <a:schemeClr val="accent1">
+              <a:shade val="15000"/>
+            </a:schemeClr>
+          </a:lnRef>
+          <a:fillRef idx="1">
+            <a:schemeClr val="accent1"/>
+          </a:fillRef>
+          <a:effectRef idx="0">
+            <a:schemeClr val="accent1"/>
+          </a:effectRef>
+          <a:fontRef idx="minor">
+            <a:schemeClr val="lt1"/>
+          </a:fontRef>
+        </p:style>
+        <p:txBody>
+          <a:bodyPr lIns="91440" tIns="45720" rIns="91440" bIns="45720" rtlCol="0" anchor="ctr"/>
+          <a:lstStyle/>
+          <a:p>
+            <a:pPr algn="ctr"/>
+            <a:endParaRPr lang="ru-RU" dirty="0"/>
+          </a:p>
+        </p:txBody>
+      </p:sp>
+      <p:sp>
+        <p:nvSpPr>
+          <p:cNvPr id="4" name="TextBox 3">
+            <a:extLst>
+              <a:ext uri="{FF2B5EF4-FFF2-40B4-BE49-F238E27FC236}">
+                <a16:creationId xmlns:a16="http://schemas.microsoft.com/office/drawing/2014/main" id="{2546EE38-56AB-D4A0-364E-5B30362083B9}"/>
+              </a:ext>
+            </a:extLst>
+          </p:cNvPr>
+          <p:cNvSpPr txBox="1"/>
+          <p:nvPr/>
+        </p:nvSpPr>
+        <p:spPr>
+          <a:xfrm>
+            <a:off x="4146467" y="332110"/>
+            <a:ext cx="3901043" cy="6524863"/>
+          </a:xfrm>
+          <a:prstGeom prst="rect">
+            <a:avLst/>
+          </a:prstGeom>
+          <a:noFill/>
+        </p:spPr>
+        <p:txBody>
+          <a:bodyPr rot="0" spcFirstLastPara="0" vertOverflow="overflow" horzOverflow="overflow" vert="horz" wrap="square" lIns="91440" tIns="45720" rIns="91440" bIns="45720" numCol="1" spcCol="0" rtlCol="0" fromWordArt="0" anchor="ctr" anchorCtr="0" forceAA="0" compatLnSpc="1">
+            <a:prstTxWarp prst="textNoShape">
+              <a:avLst/>
+            </a:prstTxWarp>
+            <a:spAutoFit/>
+          </a:bodyPr>
+          <a:lstStyle/>
+          <a:p>
+            <a:pPr algn="ctr"/>
+            <a:r>
+              <a:rPr lang="ru-RU" sz="1600">
+                <a:solidFill>
+                  <a:srgbClr val="323336"/>
+                </a:solidFill>
+                <a:ea typeface="+mn-lt"/>
+                <a:cs typeface="+mn-lt"/>
+              </a:rPr>
+              <a:t>Основная логика приложения реализована в файле main.py, где находятся маршруты Flask, обработка запросов и взаимодействие с базой данных.</a:t>
+            </a:r>
+            <a:endParaRPr lang="ru-RU"/>
+          </a:p>
+          <a:p>
+            <a:pPr algn="ctr"/>
+            <a:endParaRPr lang="ru-RU" sz="1600" dirty="0">
+              <a:solidFill>
+                <a:srgbClr val="323336"/>
+              </a:solidFill>
+              <a:ea typeface="+mn-lt"/>
+              <a:cs typeface="+mn-lt"/>
+            </a:endParaRPr>
+          </a:p>
+          <a:p>
+            <a:pPr algn="ctr"/>
+            <a:r>
+              <a:rPr lang="ru-RU" sz="1600">
+                <a:solidFill>
+                  <a:srgbClr val="323336"/>
+                </a:solidFill>
+                <a:ea typeface="+mn-lt"/>
+                <a:cs typeface="+mn-lt"/>
+              </a:rPr>
+              <a:t>Для работы с данными используется отдельный пакет data, содержащий классы моделей:</a:t>
+            </a:r>
+          </a:p>
+          <a:p>
+            <a:pPr algn="ctr"/>
+            <a:r>
+              <a:rPr lang="ru-RU" sz="1600" dirty="0">
+                <a:solidFill>
+                  <a:srgbClr val="323336"/>
+                </a:solidFill>
+                <a:ea typeface="+mn-lt"/>
+                <a:cs typeface="+mn-lt"/>
+              </a:rPr>
+              <a:t>User — хранение информации о пользователях, авторизация и работа с </a:t>
+            </a:r>
+            <a:r>
+              <a:rPr lang="ru-RU" sz="1600">
+                <a:solidFill>
+                  <a:srgbClr val="323336"/>
+                </a:solidFill>
+                <a:ea typeface="+mn-lt"/>
+                <a:cs typeface="+mn-lt"/>
+              </a:rPr>
+              <a:t>паролями</a:t>
+            </a:r>
+          </a:p>
+          <a:p>
+            <a:pPr algn="ctr"/>
+            <a:r>
+              <a:rPr lang="ru-RU" sz="1600" dirty="0">
+                <a:solidFill>
+                  <a:srgbClr val="323336"/>
+                </a:solidFill>
+                <a:ea typeface="+mn-lt"/>
+                <a:cs typeface="+mn-lt"/>
+              </a:rPr>
+              <a:t>Recipe — хранение рецептов, ингредиентов, изображений и </a:t>
+            </a:r>
+            <a:r>
+              <a:rPr lang="ru-RU" sz="1600">
+                <a:solidFill>
+                  <a:srgbClr val="323336"/>
+                </a:solidFill>
+                <a:ea typeface="+mn-lt"/>
+                <a:cs typeface="+mn-lt"/>
+              </a:rPr>
+              <a:t>характеристик блюда</a:t>
+            </a:r>
+          </a:p>
+          <a:p>
+            <a:pPr algn="ctr"/>
+            <a:r>
+              <a:rPr lang="ru-RU" sz="1600" dirty="0">
+                <a:solidFill>
+                  <a:srgbClr val="323336"/>
+                </a:solidFill>
+                <a:ea typeface="+mn-lt"/>
+                <a:cs typeface="+mn-lt"/>
+              </a:rPr>
+              <a:t>Comment — система комментариев и </a:t>
+            </a:r>
+            <a:r>
+              <a:rPr lang="ru-RU" sz="1600">
+                <a:solidFill>
+                  <a:srgbClr val="323336"/>
+                </a:solidFill>
+                <a:ea typeface="+mn-lt"/>
+                <a:cs typeface="+mn-lt"/>
+              </a:rPr>
+              <a:t>ответов</a:t>
+            </a:r>
+          </a:p>
+          <a:p>
+            <a:pPr algn="ctr"/>
+            <a:r>
+              <a:rPr lang="ru-RU" sz="1600">
+                <a:solidFill>
+                  <a:srgbClr val="323336"/>
+                </a:solidFill>
+                <a:ea typeface="+mn-lt"/>
+                <a:cs typeface="+mn-lt"/>
+              </a:rPr>
+              <a:t>Like — обработка лайков;</a:t>
+            </a:r>
+          </a:p>
+          <a:p>
+            <a:pPr algn="ctr"/>
+            <a:r>
+              <a:rPr lang="ru-RU" sz="1600" dirty="0">
+                <a:solidFill>
+                  <a:srgbClr val="323336"/>
+                </a:solidFill>
+                <a:ea typeface="+mn-lt"/>
+                <a:cs typeface="+mn-lt"/>
+              </a:rPr>
+              <a:t>Subscription — подписки между </a:t>
+            </a:r>
+            <a:r>
+              <a:rPr lang="ru-RU" sz="1600">
+                <a:solidFill>
+                  <a:srgbClr val="323336"/>
+                </a:solidFill>
+                <a:ea typeface="+mn-lt"/>
+                <a:cs typeface="+mn-lt"/>
+              </a:rPr>
+              <a:t>пользователями</a:t>
+            </a:r>
+          </a:p>
+          <a:p>
+            <a:pPr algn="ctr"/>
+            <a:r>
+              <a:rPr lang="ru-RU" sz="1600">
+                <a:solidFill>
+                  <a:srgbClr val="323336"/>
+                </a:solidFill>
+                <a:ea typeface="+mn-lt"/>
+                <a:cs typeface="+mn-lt"/>
+              </a:rPr>
+              <a:t>Message — личные сообщения и чат</a:t>
+            </a:r>
+          </a:p>
+          <a:p>
+            <a:pPr algn="ctr"/>
+            <a:r>
+              <a:rPr lang="ru-RU" sz="1600">
+                <a:solidFill>
+                  <a:srgbClr val="323336"/>
+                </a:solidFill>
+                <a:ea typeface="+mn-lt"/>
+                <a:cs typeface="+mn-lt"/>
+              </a:rPr>
+              <a:t>View — учёт просмотров рецептов</a:t>
+            </a:r>
+          </a:p>
+          <a:p>
+            <a:pPr algn="ctr"/>
+            <a:r>
+              <a:rPr lang="ru-RU" sz="1600">
+                <a:solidFill>
+                  <a:srgbClr val="323336"/>
+                </a:solidFill>
+                <a:ea typeface="+mn-lt"/>
+                <a:cs typeface="+mn-lt"/>
+              </a:rPr>
+              <a:t>db_session — настройка подключения к базе данных и создание сессий SQLAlchemy.</a:t>
+            </a:r>
+          </a:p>
+          <a:p>
+            <a:pPr algn="l"/>
+            <a:endParaRPr lang="ru-RU" dirty="0"/>
+          </a:p>
+        </p:txBody>
+      </p:sp>
+      <p:sp>
+        <p:nvSpPr>
+          <p:cNvPr id="6" name="Прямоугольник: скругленные углы 5">
+            <a:extLst>
+              <a:ext uri="{FF2B5EF4-FFF2-40B4-BE49-F238E27FC236}">
+                <a16:creationId xmlns:a16="http://schemas.microsoft.com/office/drawing/2014/main" id="{C43ED0E6-2FFE-91AC-D3FD-AE5D661A4C07}"/>
+              </a:ext>
+            </a:extLst>
+          </p:cNvPr>
+          <p:cNvSpPr/>
+          <p:nvPr/>
+        </p:nvSpPr>
+        <p:spPr>
+          <a:xfrm>
+            <a:off x="108992" y="216088"/>
+            <a:ext cx="3898204" cy="6402676"/>
+          </a:xfrm>
+          <a:prstGeom prst="roundRect">
+            <a:avLst/>
+          </a:prstGeom>
+          <a:solidFill>
+            <a:srgbClr val="EDE8ED"/>
+          </a:solidFill>
+          <a:ln>
+            <a:solidFill>
+              <a:srgbClr val="EDE8ED"/>
+            </a:solidFill>
+          </a:ln>
+        </p:spPr>
+        <p:style>
+          <a:lnRef idx="2">
+            <a:schemeClr val="accent1">
+              <a:shade val="15000"/>
+            </a:schemeClr>
+          </a:lnRef>
+          <a:fillRef idx="1">
+            <a:schemeClr val="accent1"/>
+          </a:fillRef>
+          <a:effectRef idx="0">
+            <a:schemeClr val="accent1"/>
+          </a:effectRef>
+          <a:fontRef idx="minor">
+            <a:schemeClr val="lt1"/>
+          </a:fontRef>
+        </p:style>
+        <p:txBody>
+          <a:bodyPr lIns="91440" tIns="45720" rIns="91440" bIns="45720" rtlCol="0" anchor="ctr"/>
+          <a:lstStyle/>
+          <a:p>
+            <a:pPr algn="ctr"/>
+            <a:endParaRPr lang="ru-RU" dirty="0"/>
+          </a:p>
+        </p:txBody>
+      </p:sp>
+      <p:sp>
+        <p:nvSpPr>
+          <p:cNvPr id="7" name="Прямоугольник: скругленные углы 6">
+            <a:extLst>
+              <a:ext uri="{FF2B5EF4-FFF2-40B4-BE49-F238E27FC236}">
+                <a16:creationId xmlns:a16="http://schemas.microsoft.com/office/drawing/2014/main" id="{C2CD645E-C714-EB0E-D3F4-8E9ACB24DD07}"/>
+              </a:ext>
+            </a:extLst>
+          </p:cNvPr>
+          <p:cNvSpPr/>
+          <p:nvPr/>
+        </p:nvSpPr>
+        <p:spPr>
+          <a:xfrm>
+            <a:off x="8184213" y="216087"/>
+            <a:ext cx="3898204" cy="6402676"/>
+          </a:xfrm>
+          <a:prstGeom prst="roundRect">
+            <a:avLst/>
+          </a:prstGeom>
+          <a:solidFill>
+            <a:srgbClr val="EDE8ED"/>
+          </a:solidFill>
+          <a:ln>
+            <a:solidFill>
+              <a:srgbClr val="EDE8ED"/>
+            </a:solidFill>
+          </a:ln>
+        </p:spPr>
+        <p:style>
+          <a:lnRef idx="2">
+            <a:schemeClr val="accent1">
+              <a:shade val="15000"/>
+            </a:schemeClr>
+          </a:lnRef>
+          <a:fillRef idx="1">
+            <a:schemeClr val="accent1"/>
+          </a:fillRef>
+          <a:effectRef idx="0">
+            <a:schemeClr val="accent1"/>
+          </a:effectRef>
+          <a:fontRef idx="minor">
+            <a:schemeClr val="lt1"/>
+          </a:fontRef>
+        </p:style>
+        <p:txBody>
+          <a:bodyPr lIns="91440" tIns="45720" rIns="91440" bIns="45720" rtlCol="0" anchor="ctr"/>
+          <a:lstStyle/>
+          <a:p>
+            <a:pPr algn="ctr"/>
+            <a:endParaRPr lang="ru-RU" dirty="0"/>
+          </a:p>
+        </p:txBody>
+      </p:sp>
+      <p:sp>
+        <p:nvSpPr>
+          <p:cNvPr id="9" name="TextBox 8">
+            <a:extLst>
+              <a:ext uri="{FF2B5EF4-FFF2-40B4-BE49-F238E27FC236}">
+                <a16:creationId xmlns:a16="http://schemas.microsoft.com/office/drawing/2014/main" id="{30D93F3E-2621-6F7A-C4FC-D7A564D5BF47}"/>
+              </a:ext>
+            </a:extLst>
+          </p:cNvPr>
+          <p:cNvSpPr txBox="1"/>
+          <p:nvPr/>
+        </p:nvSpPr>
+        <p:spPr>
+          <a:xfrm>
+            <a:off x="108856" y="212177"/>
+            <a:ext cx="3901043" cy="6278642"/>
+          </a:xfrm>
+          <a:prstGeom prst="rect">
+            <a:avLst/>
+          </a:prstGeom>
+          <a:noFill/>
+        </p:spPr>
+        <p:txBody>
+          <a:bodyPr rot="0" spcFirstLastPara="0" vertOverflow="overflow" horzOverflow="overflow" vert="horz" wrap="square" lIns="91440" tIns="45720" rIns="91440" bIns="45720" numCol="1" spcCol="0" rtlCol="0" fromWordArt="0" anchor="ctr" anchorCtr="0" forceAA="0" compatLnSpc="1">
+            <a:prstTxWarp prst="textNoShape">
+              <a:avLst/>
+            </a:prstTxWarp>
+            <a:spAutoFit/>
+          </a:bodyPr>
+          <a:lstStyle/>
+          <a:p>
+            <a:pPr algn="ctr"/>
+            <a:endParaRPr lang="ru-RU" sz="1600" dirty="0">
+              <a:solidFill>
+                <a:srgbClr val="323336"/>
+              </a:solidFill>
+            </a:endParaRPr>
+          </a:p>
+          <a:p>
+            <a:pPr algn="ctr"/>
+            <a:r>
+              <a:rPr lang="ru-RU" sz="1600">
+                <a:solidFill>
+                  <a:srgbClr val="323336"/>
+                </a:solidFill>
+                <a:ea typeface="+mn-lt"/>
+                <a:cs typeface="+mn-lt"/>
+              </a:rPr>
+              <a:t>При разработке проекта использовались следующие технологии:</a:t>
+            </a:r>
+            <a:endParaRPr lang="ru-RU">
+              <a:ea typeface="+mn-lt"/>
+              <a:cs typeface="+mn-lt"/>
+            </a:endParaRPr>
+          </a:p>
+          <a:p>
+            <a:pPr algn="ctr"/>
+            <a:endParaRPr lang="ru-RU" sz="1600" dirty="0">
+              <a:solidFill>
+                <a:srgbClr val="323336"/>
+              </a:solidFill>
+              <a:ea typeface="+mn-lt"/>
+              <a:cs typeface="+mn-lt"/>
+            </a:endParaRPr>
+          </a:p>
+          <a:p>
+            <a:pPr algn="ctr"/>
+            <a:r>
+              <a:rPr lang="ru-RU" sz="1600">
+                <a:solidFill>
+                  <a:srgbClr val="323336"/>
+                </a:solidFill>
+                <a:ea typeface="+mn-lt"/>
+                <a:cs typeface="+mn-lt"/>
+              </a:rPr>
+              <a:t>Python — основной язык разработки</a:t>
+            </a:r>
+            <a:endParaRPr lang="ru-RU">
+              <a:solidFill>
+                <a:srgbClr val="000000"/>
+              </a:solidFill>
+              <a:ea typeface="+mn-lt"/>
+              <a:cs typeface="+mn-lt"/>
+            </a:endParaRPr>
+          </a:p>
+          <a:p>
+            <a:pPr algn="ctr"/>
+            <a:endParaRPr lang="ru-RU" sz="1600" dirty="0">
+              <a:solidFill>
+                <a:srgbClr val="323336"/>
+              </a:solidFill>
+            </a:endParaRPr>
+          </a:p>
+          <a:p>
+            <a:pPr algn="ctr"/>
+            <a:r>
+              <a:rPr lang="ru-RU" sz="1600" dirty="0">
+                <a:solidFill>
+                  <a:srgbClr val="323336"/>
+                </a:solidFill>
+                <a:ea typeface="+mn-lt"/>
+                <a:cs typeface="+mn-lt"/>
+              </a:rPr>
+              <a:t>Flask — создание веб-приложения и </a:t>
+            </a:r>
+            <a:r>
+              <a:rPr lang="ru-RU" sz="1600">
+                <a:solidFill>
+                  <a:srgbClr val="323336"/>
+                </a:solidFill>
+                <a:ea typeface="+mn-lt"/>
+                <a:cs typeface="+mn-lt"/>
+              </a:rPr>
+              <a:t>маршрутизации</a:t>
+            </a:r>
+            <a:endParaRPr lang="ru-RU">
+              <a:solidFill>
+                <a:srgbClr val="000000"/>
+              </a:solidFill>
+              <a:ea typeface="+mn-lt"/>
+              <a:cs typeface="+mn-lt"/>
+            </a:endParaRPr>
+          </a:p>
+          <a:p>
+            <a:pPr algn="ctr"/>
+            <a:endParaRPr lang="ru-RU" sz="1600" dirty="0">
+              <a:solidFill>
+                <a:srgbClr val="323336"/>
+              </a:solidFill>
+            </a:endParaRPr>
+          </a:p>
+          <a:p>
+            <a:pPr algn="ctr"/>
+            <a:r>
+              <a:rPr lang="ru-RU" sz="1600" dirty="0">
+                <a:solidFill>
+                  <a:srgbClr val="323336"/>
+                </a:solidFill>
+                <a:ea typeface="+mn-lt"/>
+                <a:cs typeface="+mn-lt"/>
+              </a:rPr>
+              <a:t>SQLAlchemy — работа с базой данных </a:t>
+            </a:r>
+            <a:r>
+              <a:rPr lang="ru-RU" sz="1600">
+                <a:solidFill>
+                  <a:srgbClr val="323336"/>
+                </a:solidFill>
+                <a:ea typeface="+mn-lt"/>
+                <a:cs typeface="+mn-lt"/>
+              </a:rPr>
+              <a:t>через ORM</a:t>
+            </a:r>
+            <a:endParaRPr lang="ru-RU">
+              <a:solidFill>
+                <a:srgbClr val="000000"/>
+              </a:solidFill>
+              <a:ea typeface="+mn-lt"/>
+              <a:cs typeface="+mn-lt"/>
+            </a:endParaRPr>
+          </a:p>
+          <a:p>
+            <a:pPr algn="ctr"/>
+            <a:endParaRPr lang="ru-RU" sz="1600" dirty="0">
+              <a:solidFill>
+                <a:srgbClr val="323336"/>
+              </a:solidFill>
+              <a:ea typeface="+mn-lt"/>
+              <a:cs typeface="+mn-lt"/>
+            </a:endParaRPr>
+          </a:p>
+          <a:p>
+            <a:pPr algn="ctr"/>
+            <a:r>
+              <a:rPr lang="ru-RU" sz="1600">
+                <a:solidFill>
+                  <a:srgbClr val="323336"/>
+                </a:solidFill>
+                <a:ea typeface="+mn-lt"/>
+                <a:cs typeface="+mn-lt"/>
+              </a:rPr>
+              <a:t>SQLite — хранение данных приложения</a:t>
+            </a:r>
+            <a:endParaRPr lang="ru-RU">
+              <a:solidFill>
+                <a:srgbClr val="000000"/>
+              </a:solidFill>
+              <a:ea typeface="+mn-lt"/>
+              <a:cs typeface="+mn-lt"/>
+            </a:endParaRPr>
+          </a:p>
+          <a:p>
+            <a:pPr algn="ctr"/>
+            <a:endParaRPr lang="ru-RU" sz="1600" dirty="0">
+              <a:solidFill>
+                <a:srgbClr val="323336"/>
+              </a:solidFill>
+              <a:ea typeface="+mn-lt"/>
+              <a:cs typeface="+mn-lt"/>
+            </a:endParaRPr>
+          </a:p>
+          <a:p>
+            <a:pPr algn="ctr"/>
+            <a:r>
+              <a:rPr lang="ru-RU" sz="1600" dirty="0">
+                <a:solidFill>
+                  <a:srgbClr val="323336"/>
+                </a:solidFill>
+                <a:ea typeface="+mn-lt"/>
+                <a:cs typeface="+mn-lt"/>
+              </a:rPr>
+              <a:t>Flask-Login — система регистрации и </a:t>
+            </a:r>
+            <a:r>
+              <a:rPr lang="ru-RU" sz="1600">
+                <a:solidFill>
+                  <a:srgbClr val="323336"/>
+                </a:solidFill>
+                <a:ea typeface="+mn-lt"/>
+                <a:cs typeface="+mn-lt"/>
+              </a:rPr>
+              <a:t>авторизации пользователей</a:t>
+            </a:r>
+            <a:endParaRPr lang="ru-RU">
+              <a:solidFill>
+                <a:srgbClr val="000000"/>
+              </a:solidFill>
+              <a:ea typeface="+mn-lt"/>
+              <a:cs typeface="+mn-lt"/>
+            </a:endParaRPr>
+          </a:p>
+          <a:p>
+            <a:pPr algn="ctr"/>
+            <a:endParaRPr lang="ru-RU" sz="1600" dirty="0">
+              <a:solidFill>
+                <a:srgbClr val="323336"/>
+              </a:solidFill>
+              <a:ea typeface="+mn-lt"/>
+              <a:cs typeface="+mn-lt"/>
+            </a:endParaRPr>
+          </a:p>
+          <a:p>
+            <a:pPr algn="ctr"/>
+            <a:r>
+              <a:rPr lang="ru-RU" sz="1600" dirty="0">
+                <a:solidFill>
+                  <a:srgbClr val="323336"/>
+                </a:solidFill>
+                <a:ea typeface="+mn-lt"/>
+                <a:cs typeface="+mn-lt"/>
+              </a:rPr>
+              <a:t>Pillow — обработка и оптимизация </a:t>
+            </a:r>
+            <a:r>
+              <a:rPr lang="ru-RU" sz="1600">
+                <a:solidFill>
+                  <a:srgbClr val="323336"/>
+                </a:solidFill>
+                <a:ea typeface="+mn-lt"/>
+                <a:cs typeface="+mn-lt"/>
+              </a:rPr>
+              <a:t>изображений</a:t>
+            </a:r>
+            <a:endParaRPr lang="ru-RU">
+              <a:ea typeface="+mn-lt"/>
+              <a:cs typeface="+mn-lt"/>
+            </a:endParaRPr>
+          </a:p>
+          <a:p>
+            <a:pPr algn="ctr"/>
+            <a:endParaRPr lang="ru-RU" sz="1600" dirty="0">
+              <a:solidFill>
+                <a:srgbClr val="323336"/>
+              </a:solidFill>
+              <a:ea typeface="+mn-lt"/>
+              <a:cs typeface="+mn-lt"/>
+            </a:endParaRPr>
+          </a:p>
+          <a:p>
+            <a:pPr algn="ctr"/>
+            <a:r>
+              <a:rPr lang="ru-RU" sz="1600" dirty="0">
+                <a:solidFill>
+                  <a:srgbClr val="323336"/>
+                </a:solidFill>
+                <a:ea typeface="+mn-lt"/>
+                <a:cs typeface="+mn-lt"/>
+              </a:rPr>
+              <a:t>HTML, CSS и Jinja2 — создание </a:t>
+            </a:r>
+            <a:r>
+              <a:rPr lang="ru-RU" sz="1600">
+                <a:solidFill>
+                  <a:srgbClr val="323336"/>
+                </a:solidFill>
+                <a:ea typeface="+mn-lt"/>
+                <a:cs typeface="+mn-lt"/>
+              </a:rPr>
+              <a:t>пользовательского интерфейса</a:t>
+            </a:r>
+            <a:endParaRPr lang="ru-RU">
+              <a:ea typeface="+mn-lt"/>
+              <a:cs typeface="+mn-lt"/>
+            </a:endParaRPr>
+          </a:p>
+          <a:p>
+            <a:pPr algn="ctr"/>
+            <a:endParaRPr lang="ru-RU" sz="1600" dirty="0">
+              <a:solidFill>
+                <a:srgbClr val="323336"/>
+              </a:solidFill>
+              <a:ea typeface="+mn-lt"/>
+              <a:cs typeface="+mn-lt"/>
+            </a:endParaRPr>
+          </a:p>
+          <a:p>
+            <a:pPr algn="l"/>
+            <a:endParaRPr lang="ru-RU" dirty="0"/>
+          </a:p>
+        </p:txBody>
+      </p:sp>
+      <p:sp>
+        <p:nvSpPr>
+          <p:cNvPr id="10" name="TextBox 9">
+            <a:extLst>
+              <a:ext uri="{FF2B5EF4-FFF2-40B4-BE49-F238E27FC236}">
+                <a16:creationId xmlns:a16="http://schemas.microsoft.com/office/drawing/2014/main" id="{E44550CE-65FD-5C3D-1F65-6FA367B70EA2}"/>
+              </a:ext>
+            </a:extLst>
+          </p:cNvPr>
+          <p:cNvSpPr txBox="1"/>
+          <p:nvPr/>
+        </p:nvSpPr>
+        <p:spPr>
+          <a:xfrm>
+            <a:off x="8184076" y="223254"/>
+            <a:ext cx="3901043" cy="6771084"/>
+          </a:xfrm>
+          <a:prstGeom prst="rect">
+            <a:avLst/>
+          </a:prstGeom>
+          <a:noFill/>
+        </p:spPr>
+        <p:txBody>
+          <a:bodyPr rot="0" spcFirstLastPara="0" vertOverflow="overflow" horzOverflow="overflow" vert="horz" wrap="square" lIns="91440" tIns="45720" rIns="91440" bIns="45720" numCol="1" spcCol="0" rtlCol="0" fromWordArt="0" anchor="ctr" anchorCtr="0" forceAA="0" compatLnSpc="1">
+            <a:prstTxWarp prst="textNoShape">
+              <a:avLst/>
+            </a:prstTxWarp>
+            <a:spAutoFit/>
+          </a:bodyPr>
+          <a:lstStyle/>
+          <a:p>
+            <a:pPr algn="ctr"/>
+            <a:r>
+              <a:rPr lang="ru-RU" sz="1600">
+                <a:solidFill>
+                  <a:srgbClr val="323336"/>
+                </a:solidFill>
+                <a:ea typeface="+mn-lt"/>
+                <a:cs typeface="+mn-lt"/>
+              </a:rPr>
+              <a:t>К особенностям проекта можно отнести:</a:t>
+            </a:r>
+            <a:endParaRPr lang="ru-RU">
+              <a:ea typeface="+mn-lt"/>
+              <a:cs typeface="+mn-lt"/>
+            </a:endParaRPr>
+          </a:p>
+          <a:p>
+            <a:pPr algn="ctr"/>
+            <a:r>
+              <a:rPr lang="ru-RU" sz="1600" dirty="0">
+                <a:solidFill>
+                  <a:srgbClr val="323336"/>
+                </a:solidFill>
+                <a:ea typeface="+mn-lt"/>
+                <a:cs typeface="+mn-lt"/>
+              </a:rPr>
+              <a:t>• регистрацию и авторизацию </a:t>
+            </a:r>
+            <a:r>
+              <a:rPr lang="ru-RU" sz="1600">
+                <a:solidFill>
+                  <a:srgbClr val="323336"/>
+                </a:solidFill>
+                <a:ea typeface="+mn-lt"/>
+                <a:cs typeface="+mn-lt"/>
+              </a:rPr>
+              <a:t>пользователей</a:t>
+            </a:r>
+            <a:endParaRPr lang="ru-RU">
+              <a:ea typeface="+mn-lt"/>
+              <a:cs typeface="+mn-lt"/>
+            </a:endParaRPr>
+          </a:p>
+          <a:p>
+            <a:pPr algn="ctr"/>
+            <a:endParaRPr lang="ru-RU" sz="1600" dirty="0">
+              <a:solidFill>
+                <a:srgbClr val="323336"/>
+              </a:solidFill>
+              <a:ea typeface="+mn-lt"/>
+              <a:cs typeface="+mn-lt"/>
+            </a:endParaRPr>
+          </a:p>
+          <a:p>
+            <a:pPr algn="ctr"/>
+            <a:r>
+              <a:rPr lang="ru-RU" sz="1600" dirty="0">
+                <a:solidFill>
+                  <a:srgbClr val="323336"/>
+                </a:solidFill>
+                <a:ea typeface="+mn-lt"/>
+                <a:cs typeface="+mn-lt"/>
+              </a:rPr>
+              <a:t>• создание, редактирование и удаление </a:t>
+            </a:r>
+            <a:r>
+              <a:rPr lang="ru-RU" sz="1600">
+                <a:solidFill>
+                  <a:srgbClr val="323336"/>
+                </a:solidFill>
+                <a:ea typeface="+mn-lt"/>
+                <a:cs typeface="+mn-lt"/>
+              </a:rPr>
+              <a:t>рецептов</a:t>
+            </a:r>
+            <a:endParaRPr lang="ru-RU">
+              <a:solidFill>
+                <a:srgbClr val="000000"/>
+              </a:solidFill>
+              <a:ea typeface="+mn-lt"/>
+              <a:cs typeface="+mn-lt"/>
+            </a:endParaRPr>
+          </a:p>
+          <a:p>
+            <a:pPr algn="ctr"/>
+            <a:endParaRPr lang="ru-RU" sz="1600" dirty="0">
+              <a:solidFill>
+                <a:srgbClr val="323336"/>
+              </a:solidFill>
+              <a:ea typeface="+mn-lt"/>
+              <a:cs typeface="+mn-lt"/>
+            </a:endParaRPr>
+          </a:p>
+          <a:p>
+            <a:pPr algn="ctr"/>
+            <a:r>
+              <a:rPr lang="ru-RU" sz="1600">
+                <a:solidFill>
+                  <a:srgbClr val="323336"/>
+                </a:solidFill>
+                <a:ea typeface="+mn-lt"/>
+                <a:cs typeface="+mn-lt"/>
+              </a:rPr>
+              <a:t>• загрузку изображений блюд</a:t>
+            </a:r>
+            <a:endParaRPr lang="ru-RU">
+              <a:ea typeface="+mn-lt"/>
+              <a:cs typeface="+mn-lt"/>
+            </a:endParaRPr>
+          </a:p>
+          <a:p>
+            <a:pPr algn="ctr"/>
+            <a:endParaRPr lang="ru-RU" sz="1600" dirty="0">
+              <a:solidFill>
+                <a:srgbClr val="323336"/>
+              </a:solidFill>
+              <a:ea typeface="+mn-lt"/>
+              <a:cs typeface="+mn-lt"/>
+            </a:endParaRPr>
+          </a:p>
+          <a:p>
+            <a:pPr algn="ctr"/>
+            <a:r>
+              <a:rPr lang="ru-RU" sz="1600" dirty="0">
+                <a:solidFill>
+                  <a:srgbClr val="323336"/>
+                </a:solidFill>
+                <a:ea typeface="+mn-lt"/>
+                <a:cs typeface="+mn-lt"/>
+              </a:rPr>
+              <a:t>• систему лайков, просмотров и </a:t>
+            </a:r>
+            <a:r>
+              <a:rPr lang="ru-RU" sz="1600">
+                <a:solidFill>
+                  <a:srgbClr val="323336"/>
+                </a:solidFill>
+                <a:ea typeface="+mn-lt"/>
+                <a:cs typeface="+mn-lt"/>
+              </a:rPr>
+              <a:t>комментариев</a:t>
+            </a:r>
+            <a:endParaRPr lang="ru-RU">
+              <a:solidFill>
+                <a:srgbClr val="000000"/>
+              </a:solidFill>
+              <a:ea typeface="+mn-lt"/>
+              <a:cs typeface="+mn-lt"/>
+            </a:endParaRPr>
+          </a:p>
+          <a:p>
+            <a:pPr algn="ctr"/>
+            <a:endParaRPr lang="ru-RU" sz="1600" dirty="0">
+              <a:solidFill>
+                <a:srgbClr val="323336"/>
+              </a:solidFill>
+              <a:ea typeface="+mn-lt"/>
+              <a:cs typeface="+mn-lt"/>
+            </a:endParaRPr>
+          </a:p>
+          <a:p>
+            <a:pPr algn="ctr"/>
+            <a:r>
+              <a:rPr lang="ru-RU" sz="1600">
+                <a:solidFill>
+                  <a:srgbClr val="323336"/>
+                </a:solidFill>
+                <a:ea typeface="+mn-lt"/>
+                <a:cs typeface="+mn-lt"/>
+              </a:rPr>
+              <a:t>• подписки на других пользователей</a:t>
+            </a:r>
+            <a:endParaRPr lang="ru-RU"/>
+          </a:p>
+          <a:p>
+            <a:pPr algn="ctr"/>
+            <a:endParaRPr lang="ru-RU" sz="1600" dirty="0">
+              <a:solidFill>
+                <a:srgbClr val="323336"/>
+              </a:solidFill>
+              <a:ea typeface="+mn-lt"/>
+              <a:cs typeface="+mn-lt"/>
+            </a:endParaRPr>
+          </a:p>
+          <a:p>
+            <a:pPr algn="ctr"/>
+            <a:r>
+              <a:rPr lang="ru-RU" sz="1600" dirty="0">
+                <a:solidFill>
+                  <a:srgbClr val="323336"/>
+                </a:solidFill>
+                <a:ea typeface="+mn-lt"/>
+                <a:cs typeface="+mn-lt"/>
+              </a:rPr>
+              <a:t>• встроенный чат между </a:t>
+            </a:r>
+            <a:r>
+              <a:rPr lang="ru-RU" sz="1600">
+                <a:solidFill>
+                  <a:srgbClr val="323336"/>
+                </a:solidFill>
+                <a:ea typeface="+mn-lt"/>
+                <a:cs typeface="+mn-lt"/>
+              </a:rPr>
+              <a:t>пользователями</a:t>
+            </a:r>
+            <a:endParaRPr lang="ru-RU">
+              <a:solidFill>
+                <a:srgbClr val="000000"/>
+              </a:solidFill>
+              <a:ea typeface="+mn-lt"/>
+              <a:cs typeface="+mn-lt"/>
+            </a:endParaRPr>
+          </a:p>
+          <a:p>
+            <a:pPr algn="ctr"/>
+            <a:endParaRPr lang="ru-RU" sz="1600" dirty="0">
+              <a:solidFill>
+                <a:srgbClr val="323336"/>
+              </a:solidFill>
+              <a:ea typeface="+mn-lt"/>
+              <a:cs typeface="+mn-lt"/>
+            </a:endParaRPr>
+          </a:p>
+          <a:p>
+            <a:pPr algn="ctr"/>
+            <a:r>
+              <a:rPr lang="ru-RU" sz="1600">
+                <a:solidFill>
+                  <a:srgbClr val="323336"/>
+                </a:solidFill>
+                <a:ea typeface="+mn-lt"/>
+                <a:cs typeface="+mn-lt"/>
+              </a:rPr>
+              <a:t>• поиск рецептов и пользователей</a:t>
+            </a:r>
+            <a:endParaRPr lang="ru-RU">
+              <a:ea typeface="+mn-lt"/>
+              <a:cs typeface="+mn-lt"/>
+            </a:endParaRPr>
+          </a:p>
+          <a:p>
+            <a:pPr algn="ctr"/>
+            <a:endParaRPr lang="ru-RU" sz="1600" dirty="0">
+              <a:solidFill>
+                <a:srgbClr val="323336"/>
+              </a:solidFill>
+              <a:ea typeface="+mn-lt"/>
+              <a:cs typeface="+mn-lt"/>
+            </a:endParaRPr>
+          </a:p>
+          <a:p>
+            <a:pPr algn="ctr"/>
+            <a:r>
+              <a:rPr lang="ru-RU" sz="1600" dirty="0">
+                <a:solidFill>
+                  <a:srgbClr val="323336"/>
+                </a:solidFill>
+                <a:ea typeface="+mn-lt"/>
+                <a:cs typeface="+mn-lt"/>
+              </a:rPr>
+              <a:t>• фильтрацию рецептов по категориям и </a:t>
+            </a:r>
+            <a:r>
+              <a:rPr lang="ru-RU" sz="1600">
+                <a:solidFill>
+                  <a:srgbClr val="323336"/>
+                </a:solidFill>
+                <a:ea typeface="+mn-lt"/>
+                <a:cs typeface="+mn-lt"/>
+              </a:rPr>
+              <a:t>параметрам</a:t>
+            </a:r>
+            <a:endParaRPr lang="ru-RU">
+              <a:ea typeface="+mn-lt"/>
+              <a:cs typeface="+mn-lt"/>
+            </a:endParaRPr>
+          </a:p>
+          <a:p>
+            <a:pPr algn="ctr"/>
+            <a:endParaRPr lang="ru-RU" sz="1600" dirty="0">
+              <a:solidFill>
+                <a:srgbClr val="323336"/>
+              </a:solidFill>
+              <a:ea typeface="+mn-lt"/>
+              <a:cs typeface="+mn-lt"/>
+            </a:endParaRPr>
+          </a:p>
+          <a:p>
+            <a:pPr algn="ctr"/>
+            <a:r>
+              <a:rPr lang="ru-RU" sz="1600" dirty="0">
+                <a:solidFill>
+                  <a:srgbClr val="323336"/>
+                </a:solidFill>
+                <a:ea typeface="+mn-lt"/>
+                <a:cs typeface="+mn-lt"/>
+              </a:rPr>
+              <a:t>• адаптивную структуру интерфейса и </a:t>
+            </a:r>
+            <a:r>
+              <a:rPr lang="ru-RU" sz="1600">
+                <a:solidFill>
+                  <a:srgbClr val="323336"/>
+                </a:solidFill>
+                <a:ea typeface="+mn-lt"/>
+                <a:cs typeface="+mn-lt"/>
+              </a:rPr>
+              <a:t>разделение логики по модулям</a:t>
+            </a:r>
+            <a:endParaRPr lang="ru-RU">
+              <a:ea typeface="+mn-lt"/>
+              <a:cs typeface="+mn-lt"/>
+            </a:endParaRPr>
+          </a:p>
+          <a:p>
+            <a:pPr algn="ctr"/>
+            <a:endParaRPr lang="ru-RU" sz="1600" dirty="0">
+              <a:solidFill>
+                <a:srgbClr val="323336"/>
+              </a:solidFill>
+              <a:ea typeface="+mn-lt"/>
+              <a:cs typeface="+mn-lt"/>
+            </a:endParaRPr>
+          </a:p>
+          <a:p>
+            <a:pPr algn="l"/>
+            <a:endParaRPr lang="ru-RU" dirty="0"/>
+          </a:p>
+        </p:txBody>
+      </p:sp>
+    </p:spTree>
+    <p:extLst>
+      <p:ext uri="{BB962C8B-B14F-4D97-AF65-F5344CB8AC3E}">
+        <p14:creationId xmlns:p14="http://schemas.microsoft.com/office/powerpoint/2010/main" val="1018450829"/>
+      </p:ext>
+    </p:extLst>
+  </p:cSld>
+  <p:clrMapOvr>
+    <a:masterClrMapping/>
+  </p:clrMapOvr>
+  <mc:AlternateContent xmlns:mc="http://schemas.openxmlformats.org/markup-compatibility/2006">
+    <mc:Choice xmlns:p159="http://schemas.microsoft.com/office/powerpoint/2015/09/main" Requires="p159">
+      <p:transition xmlns:p14="http://schemas.microsoft.com/office/powerpoint/2010/main" spd="slow" p14:dur="2000">
+        <p159:morph option="byObject"/>
+      </p:transition>
+    </mc:Choice>
+    <mc:Fallback>
+      <p:transition spd="slow">
+        <p:fade/>
+      </p:transition>
+    </mc:Fallback>
+  </mc:AlternateContent>
+</p:sld>
+</file>
+
+<file path=ppt/slides/slide13.xml><?xml version="1.0" encoding="utf-8"?>
+<p:sld xmlns:a="http://schemas.openxmlformats.org/drawingml/2006/main" xmlns:r="http://schemas.openxmlformats.org/officeDocument/2006/relationships" xmlns:p="http://schemas.openxmlformats.org/presentationml/2006/main">
+  <p:cSld>
+    <p:spTree>
+      <p:nvGrpSpPr>
+        <p:cNvPr id="1" name=""/>
+        <p:cNvGrpSpPr/>
+        <p:nvPr/>
+      </p:nvGrpSpPr>
+      <p:grpSpPr>
+        <a:xfrm>
+          <a:off x="0" y="0"/>
+          <a:ext cx="0" cy="0"/>
+          <a:chOff x="0" y="0"/>
+          <a:chExt cx="0" cy="0"/>
+        </a:xfrm>
+      </p:grpSpPr>
+      <p:sp>
+        <p:nvSpPr>
+          <p:cNvPr id="3" name="Прямоугольник: скругленные углы 2">
+            <a:extLst>
+              <a:ext uri="{FF2B5EF4-FFF2-40B4-BE49-F238E27FC236}">
+                <a16:creationId xmlns:a16="http://schemas.microsoft.com/office/drawing/2014/main" id="{4380C25E-4A4B-2EE2-8DA3-DCFC924A2E0C}"/>
+              </a:ext>
+            </a:extLst>
+          </p:cNvPr>
+          <p:cNvSpPr/>
+          <p:nvPr/>
+        </p:nvSpPr>
+        <p:spPr>
+          <a:xfrm>
+            <a:off x="244907" y="212580"/>
+            <a:ext cx="4476938" cy="3383362"/>
+          </a:xfrm>
+          <a:prstGeom prst="roundRect">
+            <a:avLst/>
+          </a:prstGeom>
+          <a:solidFill>
+            <a:srgbClr val="EDE8ED"/>
+          </a:solidFill>
+          <a:ln>
+            <a:solidFill>
+              <a:srgbClr val="EDE8ED"/>
+            </a:solidFill>
+          </a:ln>
+        </p:spPr>
+        <p:style>
+          <a:lnRef idx="2">
+            <a:schemeClr val="accent1">
+              <a:shade val="15000"/>
+            </a:schemeClr>
+          </a:lnRef>
+          <a:fillRef idx="1">
+            <a:schemeClr val="accent1"/>
+          </a:fillRef>
+          <a:effectRef idx="0">
+            <a:schemeClr val="accent1"/>
+          </a:effectRef>
+          <a:fontRef idx="minor">
+            <a:schemeClr val="lt1"/>
+          </a:fontRef>
+        </p:style>
+        <p:txBody>
+          <a:bodyPr lIns="91440" tIns="45720" rIns="91440" bIns="45720" rtlCol="0" anchor="ctr"/>
+          <a:lstStyle/>
+          <a:p>
+            <a:pPr algn="ctr"/>
+            <a:endParaRPr lang="ru-RU" dirty="0"/>
+          </a:p>
+        </p:txBody>
+      </p:sp>
+      <p:sp>
+        <p:nvSpPr>
+          <p:cNvPr id="4" name="TextBox 3">
+            <a:extLst>
+              <a:ext uri="{FF2B5EF4-FFF2-40B4-BE49-F238E27FC236}">
+                <a16:creationId xmlns:a16="http://schemas.microsoft.com/office/drawing/2014/main" id="{D671E613-D89E-E4CB-D4C2-796AA276A225}"/>
+              </a:ext>
+            </a:extLst>
+          </p:cNvPr>
+          <p:cNvSpPr txBox="1"/>
+          <p:nvPr/>
+        </p:nvSpPr>
+        <p:spPr>
+          <a:xfrm>
+            <a:off x="366531" y="462744"/>
+            <a:ext cx="4238261" cy="3139321"/>
+          </a:xfrm>
+          <a:prstGeom prst="rect">
+            <a:avLst/>
+          </a:prstGeom>
+          <a:noFill/>
+        </p:spPr>
+        <p:txBody>
+          <a:bodyPr rot="0" spcFirstLastPara="0" vertOverflow="overflow" horzOverflow="overflow" vert="horz" wrap="square" lIns="91440" tIns="45720" rIns="91440" bIns="45720" numCol="1" spcCol="0" rtlCol="0" fromWordArt="0" anchor="ctr" anchorCtr="0" forceAA="0" compatLnSpc="1">
+            <a:prstTxWarp prst="textNoShape">
+              <a:avLst/>
+            </a:prstTxWarp>
+            <a:spAutoFit/>
+          </a:bodyPr>
+          <a:lstStyle/>
+          <a:p>
+            <a:r>
+              <a:rPr lang="ru-RU">
+                <a:solidFill>
+                  <a:srgbClr val="323336"/>
+                </a:solidFill>
+                <a:ea typeface="+mn-lt"/>
+                <a:cs typeface="+mn-lt"/>
+              </a:rPr>
+              <a:t>В ходе выполнения проекта было разработано полноценное веб-приложение для публикации и поиска рецептов с элементами социальной сети. Были реализованы основные функции: регистрация и авторизация пользователей, создание рецептов, система комментариев и лайков, подписки, поиск и обмен сообщениями между пользователями.</a:t>
+            </a:r>
+            <a:endParaRPr lang="ru-RU" dirty="0">
+              <a:solidFill>
+                <a:srgbClr val="323336"/>
+              </a:solidFill>
+              <a:ea typeface="+mn-lt"/>
+              <a:cs typeface="+mn-lt"/>
+            </a:endParaRPr>
+          </a:p>
+          <a:p>
+            <a:endParaRPr lang="ru-RU" dirty="0">
+              <a:solidFill>
+                <a:srgbClr val="323336"/>
+              </a:solidFill>
+              <a:ea typeface="+mn-lt"/>
+              <a:cs typeface="+mn-lt"/>
+            </a:endParaRPr>
+          </a:p>
+        </p:txBody>
+      </p:sp>
+      <p:sp>
+        <p:nvSpPr>
+          <p:cNvPr id="5" name="Прямоугольник: скругленные углы 4">
+            <a:extLst>
+              <a:ext uri="{FF2B5EF4-FFF2-40B4-BE49-F238E27FC236}">
+                <a16:creationId xmlns:a16="http://schemas.microsoft.com/office/drawing/2014/main" id="{25A93750-5EF1-68FE-878E-B5CB534EEDD8}"/>
+              </a:ext>
+            </a:extLst>
+          </p:cNvPr>
+          <p:cNvSpPr/>
+          <p:nvPr/>
+        </p:nvSpPr>
+        <p:spPr>
+          <a:xfrm>
+            <a:off x="4951944" y="212579"/>
+            <a:ext cx="4476938" cy="3383362"/>
+          </a:xfrm>
+          <a:prstGeom prst="roundRect">
+            <a:avLst/>
+          </a:prstGeom>
+          <a:solidFill>
+            <a:srgbClr val="EDE8ED"/>
+          </a:solidFill>
+          <a:ln>
+            <a:solidFill>
+              <a:srgbClr val="EDE8ED"/>
+            </a:solidFill>
+          </a:ln>
+        </p:spPr>
+        <p:style>
+          <a:lnRef idx="2">
+            <a:schemeClr val="accent1">
+              <a:shade val="15000"/>
+            </a:schemeClr>
+          </a:lnRef>
+          <a:fillRef idx="1">
+            <a:schemeClr val="accent1"/>
+          </a:fillRef>
+          <a:effectRef idx="0">
+            <a:schemeClr val="accent1"/>
+          </a:effectRef>
+          <a:fontRef idx="minor">
+            <a:schemeClr val="lt1"/>
+          </a:fontRef>
+        </p:style>
+        <p:txBody>
+          <a:bodyPr lIns="91440" tIns="45720" rIns="91440" bIns="45720" rtlCol="0" anchor="ctr"/>
+          <a:lstStyle/>
+          <a:p>
+            <a:pPr algn="ctr"/>
+            <a:endParaRPr lang="ru-RU" dirty="0"/>
+          </a:p>
+        </p:txBody>
+      </p:sp>
+      <p:sp>
+        <p:nvSpPr>
+          <p:cNvPr id="6" name="TextBox 5">
+            <a:extLst>
+              <a:ext uri="{FF2B5EF4-FFF2-40B4-BE49-F238E27FC236}">
+                <a16:creationId xmlns:a16="http://schemas.microsoft.com/office/drawing/2014/main" id="{D7AB6879-F981-0C7F-3B5A-7BE27ECEDCF4}"/>
+              </a:ext>
+            </a:extLst>
+          </p:cNvPr>
+          <p:cNvSpPr txBox="1"/>
+          <p:nvPr/>
+        </p:nvSpPr>
+        <p:spPr>
+          <a:xfrm>
+            <a:off x="5110274" y="459578"/>
+            <a:ext cx="4006767" cy="3139321"/>
+          </a:xfrm>
+          <a:prstGeom prst="rect">
+            <a:avLst/>
+          </a:prstGeom>
+          <a:noFill/>
+        </p:spPr>
+        <p:txBody>
+          <a:bodyPr rot="0" spcFirstLastPara="0" vertOverflow="overflow" horzOverflow="overflow" vert="horz" wrap="square" lIns="91440" tIns="45720" rIns="91440" bIns="45720" numCol="1" spcCol="0" rtlCol="0" fromWordArt="0" anchor="ctr" anchorCtr="0" forceAA="0" compatLnSpc="1">
+            <a:prstTxWarp prst="textNoShape">
+              <a:avLst/>
+            </a:prstTxWarp>
+            <a:spAutoFit/>
+          </a:bodyPr>
+          <a:lstStyle/>
+          <a:p>
+            <a:pPr algn="ctr"/>
+            <a:r>
+              <a:rPr lang="ru-RU">
+                <a:solidFill>
+                  <a:srgbClr val="323336"/>
+                </a:solidFill>
+                <a:ea typeface="+mn-lt"/>
+                <a:cs typeface="+mn-lt"/>
+              </a:rPr>
+              <a:t>Во время разработки были изучены принципы клиент-серверной архитектуры, работа с базами данных, организация взаимодействия между модулями приложения и создание пользовательского интерфейса. Использование Flask и SQLAlchemy позволило создать удобную и расширяемую структуру проекта.</a:t>
+            </a:r>
+            <a:endParaRPr lang="ru-RU">
+              <a:solidFill>
+                <a:srgbClr val="323336"/>
+              </a:solidFill>
+            </a:endParaRPr>
+          </a:p>
+          <a:p>
+            <a:pPr algn="l"/>
+            <a:endParaRPr lang="ru-RU" dirty="0"/>
+          </a:p>
+        </p:txBody>
+      </p:sp>
+      <p:sp>
+        <p:nvSpPr>
+          <p:cNvPr id="8" name="Прямоугольник: скругленные углы 7">
+            <a:extLst>
+              <a:ext uri="{FF2B5EF4-FFF2-40B4-BE49-F238E27FC236}">
+                <a16:creationId xmlns:a16="http://schemas.microsoft.com/office/drawing/2014/main" id="{F175E728-E5DC-CCB4-C749-8EB893D1BF63}"/>
+              </a:ext>
+            </a:extLst>
+          </p:cNvPr>
+          <p:cNvSpPr/>
+          <p:nvPr/>
+        </p:nvSpPr>
+        <p:spPr>
+          <a:xfrm>
+            <a:off x="244907" y="4022580"/>
+            <a:ext cx="4476938" cy="2187311"/>
+          </a:xfrm>
+          <a:prstGeom prst="roundRect">
+            <a:avLst/>
+          </a:prstGeom>
+          <a:solidFill>
+            <a:srgbClr val="EDE8ED"/>
+          </a:solidFill>
+          <a:ln>
+            <a:solidFill>
+              <a:srgbClr val="EDE8ED"/>
+            </a:solidFill>
+          </a:ln>
+        </p:spPr>
+        <p:style>
+          <a:lnRef idx="2">
+            <a:schemeClr val="accent1">
+              <a:shade val="15000"/>
+            </a:schemeClr>
+          </a:lnRef>
+          <a:fillRef idx="1">
+            <a:schemeClr val="accent1"/>
+          </a:fillRef>
+          <a:effectRef idx="0">
+            <a:schemeClr val="accent1"/>
+          </a:effectRef>
+          <a:fontRef idx="minor">
+            <a:schemeClr val="lt1"/>
+          </a:fontRef>
+        </p:style>
+        <p:txBody>
+          <a:bodyPr lIns="91440" tIns="45720" rIns="91440" bIns="45720" rtlCol="0" anchor="ctr"/>
+          <a:lstStyle/>
+          <a:p>
+            <a:pPr algn="ctr"/>
+            <a:endParaRPr lang="ru-RU" dirty="0"/>
+          </a:p>
+        </p:txBody>
+      </p:sp>
+      <p:sp>
+        <p:nvSpPr>
+          <p:cNvPr id="9" name="TextBox 8">
+            <a:extLst>
+              <a:ext uri="{FF2B5EF4-FFF2-40B4-BE49-F238E27FC236}">
+                <a16:creationId xmlns:a16="http://schemas.microsoft.com/office/drawing/2014/main" id="{E2CBFE67-D3FD-6FF4-B9CC-847BB2F0F04C}"/>
+              </a:ext>
+            </a:extLst>
+          </p:cNvPr>
+          <p:cNvSpPr txBox="1"/>
+          <p:nvPr/>
+        </p:nvSpPr>
+        <p:spPr>
+          <a:xfrm>
+            <a:off x="366530" y="4115692"/>
+            <a:ext cx="4238261" cy="2585323"/>
+          </a:xfrm>
+          <a:prstGeom prst="rect">
+            <a:avLst/>
+          </a:prstGeom>
+          <a:noFill/>
+        </p:spPr>
+        <p:txBody>
+          <a:bodyPr rot="0" spcFirstLastPara="0" vertOverflow="overflow" horzOverflow="overflow" vert="horz" wrap="square" lIns="91440" tIns="45720" rIns="91440" bIns="45720" numCol="1" spcCol="0" rtlCol="0" fromWordArt="0" anchor="ctr" anchorCtr="0" forceAA="0" compatLnSpc="1">
+            <a:prstTxWarp prst="textNoShape">
+              <a:avLst/>
+            </a:prstTxWarp>
+            <a:spAutoFit/>
+          </a:bodyPr>
+          <a:lstStyle/>
+          <a:p>
+            <a:r>
+              <a:rPr lang="ru-RU">
+                <a:solidFill>
+                  <a:srgbClr val="323336"/>
+                </a:solidFill>
+                <a:ea typeface="+mn-lt"/>
+                <a:cs typeface="+mn-lt"/>
+              </a:rPr>
+              <a:t>Проект имеет возможности для дальнейшего развития. В будущем можно добавить: поддержку видео-рецептов, расширенную сортировку и фильтрацию, уведомления для пользователей, сохранение рецептов в избранное и многое другое</a:t>
+            </a:r>
+            <a:endParaRPr lang="ru-RU"/>
+          </a:p>
+          <a:p>
+            <a:endParaRPr lang="ru-RU" dirty="0">
+              <a:solidFill>
+                <a:srgbClr val="323336"/>
+              </a:solidFill>
+              <a:ea typeface="+mn-lt"/>
+              <a:cs typeface="+mn-lt"/>
+            </a:endParaRPr>
+          </a:p>
+          <a:p>
+            <a:endParaRPr lang="ru-RU" dirty="0">
+              <a:solidFill>
+                <a:srgbClr val="323336"/>
+              </a:solidFill>
+              <a:ea typeface="+mn-lt"/>
+              <a:cs typeface="+mn-lt"/>
+            </a:endParaRPr>
+          </a:p>
+        </p:txBody>
+      </p:sp>
+      <p:pic>
+        <p:nvPicPr>
+          <p:cNvPr id="11" name="Рисунок 10" descr="Изображение выглядит как цветок, растение, лепесток, Прострел раскрытый&#10;&#10;Содержимое, созданное искусственным интеллектом, может быть неверным.">
+            <a:extLst>
+              <a:ext uri="{FF2B5EF4-FFF2-40B4-BE49-F238E27FC236}">
+                <a16:creationId xmlns:a16="http://schemas.microsoft.com/office/drawing/2014/main" id="{BE69168E-194B-993D-D52D-2E121EEFCBAA}"/>
+              </a:ext>
+            </a:extLst>
+          </p:cNvPr>
+          <p:cNvPicPr>
+            <a:picLocks noChangeAspect="1"/>
+          </p:cNvPicPr>
+          <p:nvPr/>
+        </p:nvPicPr>
+        <p:blipFill>
+          <a:blip r:embed="rId2"/>
+          <a:stretch>
+            <a:fillRect/>
+          </a:stretch>
+        </p:blipFill>
+        <p:spPr>
+          <a:xfrm>
+            <a:off x="8859817" y="2933338"/>
+            <a:ext cx="3095505" cy="3161577"/>
+          </a:xfrm>
+          <a:prstGeom prst="rect">
+            <a:avLst/>
+          </a:prstGeom>
+        </p:spPr>
+      </p:pic>
+    </p:spTree>
+    <p:extLst>
+      <p:ext uri="{BB962C8B-B14F-4D97-AF65-F5344CB8AC3E}">
+        <p14:creationId xmlns:p14="http://schemas.microsoft.com/office/powerpoint/2010/main" val="2638410334"/>
+      </p:ext>
+    </p:extLst>
+  </p:cSld>
+  <p:clrMapOvr>
+    <a:masterClrMapping/>
+  </p:clrMapOvr>
+</p:sld>
+</file>
+
 <file path=ppt/slides/slide2.xml><?xml version="1.0" encoding="utf-8"?>
 <p:sld xmlns:a="http://schemas.openxmlformats.org/drawingml/2006/main" xmlns:r="http://schemas.openxmlformats.org/officeDocument/2006/relationships" xmlns:p="http://schemas.openxmlformats.org/presentationml/2006/main">
   <p:cSld>
@@ -4187,13 +7825,13 @@
   <p:clrMapOvr>
     <a:masterClrMapping/>
   </p:clrMapOvr>
-  <mc:AlternateContent xmlns:mc="http://schemas.openxmlformats.org/markup-compatibility/2006">
-    <mc:Choice xmlns:p159="http://schemas.microsoft.com/office/powerpoint/2015/09/main" Requires="p159">
+  <mc:AlternateContent xmlns:mc="http://schemas.openxmlformats.org/markup-compatibility/2006" xmlns:p159="http://schemas.microsoft.com/office/powerpoint/2015/09/main">
+    <mc:Choice Requires="p159">
       <p:transition xmlns:p14="http://schemas.microsoft.com/office/powerpoint/2010/main" spd="slow" p14:dur="2000">
         <p159:morph option="byObject"/>
       </p:transition>
     </mc:Choice>
-    <mc:Fallback>
+    <mc:Fallback xmlns="">
       <p:transition spd="slow">
         <p:fade/>
       </p:transition>
@@ -4501,13 +8139,13 @@
   <p:clrMapOvr>
     <a:masterClrMapping/>
   </p:clrMapOvr>
-  <mc:AlternateContent xmlns:mc="http://schemas.openxmlformats.org/markup-compatibility/2006">
-    <mc:Choice xmlns:p159="http://schemas.microsoft.com/office/powerpoint/2015/09/main" Requires="p159">
+  <mc:AlternateContent xmlns:mc="http://schemas.openxmlformats.org/markup-compatibility/2006" xmlns:p159="http://schemas.microsoft.com/office/powerpoint/2015/09/main">
+    <mc:Choice Requires="p159">
       <p:transition xmlns:p14="http://schemas.microsoft.com/office/powerpoint/2010/main" spd="slow" p14:dur="2000">
         <p159:morph option="byObject"/>
       </p:transition>
     </mc:Choice>
-    <mc:Fallback>
+    <mc:Fallback xmlns="">
       <p:transition spd="slow">
         <p:fade/>
       </p:transition>
@@ -4539,6 +8177,66 @@
           <a:chExt cx="0" cy="0"/>
         </a:xfrm>
       </p:grpSpPr>
+      <p:pic>
+        <p:nvPicPr>
+          <p:cNvPr id="5" name="Рисунок 4" descr="Изображение выглядит как текст, выпечка, десерт, Легкая закуска&#10;&#10;Содержимое, созданное искусственным интеллектом, может быть неверным.">
+            <a:extLst>
+              <a:ext uri="{FF2B5EF4-FFF2-40B4-BE49-F238E27FC236}">
+                <a16:creationId xmlns:a16="http://schemas.microsoft.com/office/drawing/2014/main" id="{260A0083-A125-4742-C9BE-EE93B364F3AB}"/>
+              </a:ext>
+            </a:extLst>
+          </p:cNvPr>
+          <p:cNvPicPr>
+            <a:picLocks noChangeAspect="1"/>
+          </p:cNvPicPr>
+          <p:nvPr/>
+        </p:nvPicPr>
+        <p:blipFill>
+          <a:blip r:embed="rId2"/>
+          <a:stretch>
+            <a:fillRect/>
+          </a:stretch>
+        </p:blipFill>
+        <p:spPr>
+          <a:xfrm>
+            <a:off x="4555482" y="-4875232"/>
+            <a:ext cx="6534150" cy="4667250"/>
+          </a:xfrm>
+          <a:prstGeom prst="rect">
+            <a:avLst/>
+          </a:prstGeom>
+        </p:spPr>
+      </p:pic>
+      <p:pic>
+        <p:nvPicPr>
+          <p:cNvPr id="2" name="Рисунок 1" descr="Изображение выглядит как текст, Легкая закуска, десерт, выпечка&#10;&#10;Содержимое, созданное искусственным интеллектом, может быть неверным.">
+            <a:extLst>
+              <a:ext uri="{FF2B5EF4-FFF2-40B4-BE49-F238E27FC236}">
+                <a16:creationId xmlns:a16="http://schemas.microsoft.com/office/drawing/2014/main" id="{07F60FC3-D9F1-62DE-6A54-A22B3ADD2F1E}"/>
+              </a:ext>
+            </a:extLst>
+          </p:cNvPr>
+          <p:cNvPicPr>
+            <a:picLocks noChangeAspect="1"/>
+          </p:cNvPicPr>
+          <p:nvPr/>
+        </p:nvPicPr>
+        <p:blipFill>
+          <a:blip r:embed="rId3"/>
+          <a:stretch>
+            <a:fillRect/>
+          </a:stretch>
+        </p:blipFill>
+        <p:spPr>
+          <a:xfrm>
+            <a:off x="3684969" y="2168204"/>
+            <a:ext cx="7792898" cy="4566454"/>
+          </a:xfrm>
+          <a:prstGeom prst="rect">
+            <a:avLst/>
+          </a:prstGeom>
+        </p:spPr>
+      </p:pic>
       <p:sp>
         <p:nvSpPr>
           <p:cNvPr id="4" name="Прямоугольник: скругленные углы 3">
@@ -4608,7 +8306,7 @@
           <p:nvPr/>
         </p:nvPicPr>
         <p:blipFill>
-          <a:blip r:embed="rId2"/>
+          <a:blip r:embed="rId4"/>
           <a:stretch>
             <a:fillRect/>
           </a:stretch>
@@ -4655,19 +8353,105 @@
           <a:lstStyle/>
           <a:p>
             <a:r>
-              <a:rPr lang="ru-RU"/>
+              <a:rPr lang="ru-RU">
+                <a:solidFill>
+                  <a:srgbClr val="323336"/>
+                </a:solidFill>
+              </a:rPr>
               <a:t>Личный кабинет позволяет хранить и структурировать все добавленные рецепты. Пользователь может в любой момент дополнить свою коллекцию, развивая проект и делясь вдохновением с другими участниками </a:t>
             </a:r>
-            <a:endParaRPr lang="ru-RU" dirty="0"/>
-          </a:p>
-        </p:txBody>
-      </p:sp>
+            <a:endParaRPr lang="ru-RU" dirty="0">
+              <a:solidFill>
+                <a:srgbClr val="323336"/>
+              </a:solidFill>
+            </a:endParaRPr>
+          </a:p>
+        </p:txBody>
+      </p:sp>
+    </p:spTree>
+    <p:extLst>
+      <p:ext uri="{BB962C8B-B14F-4D97-AF65-F5344CB8AC3E}">
+        <p14:creationId xmlns:p14="http://schemas.microsoft.com/office/powerpoint/2010/main" val="4010201446"/>
+      </p:ext>
+    </p:extLst>
+  </p:cSld>
+  <p:clrMapOvr>
+    <a:masterClrMapping/>
+  </p:clrMapOvr>
+  <mc:AlternateContent xmlns:mc="http://schemas.openxmlformats.org/markup-compatibility/2006" xmlns:p159="http://schemas.microsoft.com/office/powerpoint/2015/09/main">
+    <mc:Choice Requires="p159">
+      <p:transition xmlns:p14="http://schemas.microsoft.com/office/powerpoint/2010/main" spd="slow" p14:dur="2000">
+        <p159:morph option="byObject"/>
+      </p:transition>
+    </mc:Choice>
+    <mc:Fallback xmlns="">
+      <p:transition spd="slow">
+        <p:fade/>
+      </p:transition>
+    </mc:Fallback>
+  </mc:AlternateContent>
+</p:sld>
+</file>
+
+<file path=ppt/slides/slide6.xml><?xml version="1.0" encoding="utf-8"?>
+<p:sld xmlns:a="http://schemas.openxmlformats.org/drawingml/2006/main" xmlns:r="http://schemas.openxmlformats.org/officeDocument/2006/relationships" xmlns:p="http://schemas.openxmlformats.org/presentationml/2006/main">
+  <p:cSld>
+    <p:spTree>
+      <p:nvGrpSpPr>
+        <p:cNvPr id="1" name="">
+          <a:extLst>
+            <a:ext uri="{FF2B5EF4-FFF2-40B4-BE49-F238E27FC236}">
+              <a16:creationId xmlns:a16="http://schemas.microsoft.com/office/drawing/2014/main" id="{AC89B9B8-7E1C-C07D-6ADF-B4159DF54731}"/>
+            </a:ext>
+          </a:extLst>
+        </p:cNvPr>
+        <p:cNvGrpSpPr/>
+        <p:nvPr/>
+      </p:nvGrpSpPr>
+      <p:grpSpPr>
+        <a:xfrm>
+          <a:off x="0" y="0"/>
+          <a:ext cx="0" cy="0"/>
+          <a:chOff x="0" y="0"/>
+          <a:chExt cx="0" cy="0"/>
+        </a:xfrm>
+      </p:grpSpPr>
       <p:pic>
         <p:nvPicPr>
-          <p:cNvPr id="2" name="Рисунок 1" descr="Изображение выглядит как текст, снимок экрана&#10;&#10;Содержимое, созданное искусственным интеллектом, может быть неверным.">
+          <p:cNvPr id="5" name="Рисунок 4" descr="Изображение выглядит как текст, выпечка, десерт, Легкая закуска&#10;&#10;Содержимое, созданное искусственным интеллектом, может быть неверным.">
             <a:extLst>
               <a:ext uri="{FF2B5EF4-FFF2-40B4-BE49-F238E27FC236}">
-                <a16:creationId xmlns:a16="http://schemas.microsoft.com/office/drawing/2014/main" id="{BF88FA6B-AB10-EB6C-627D-50FEE75E8956}"/>
+                <a16:creationId xmlns:a16="http://schemas.microsoft.com/office/drawing/2014/main" id="{A15DF90A-48BF-103B-BCF1-1403F3DC95EA}"/>
+              </a:ext>
+            </a:extLst>
+          </p:cNvPr>
+          <p:cNvPicPr>
+            <a:picLocks noChangeAspect="1"/>
+          </p:cNvPicPr>
+          <p:nvPr/>
+        </p:nvPicPr>
+        <p:blipFill>
+          <a:blip r:embed="rId2"/>
+          <a:stretch>
+            <a:fillRect/>
+          </a:stretch>
+        </p:blipFill>
+        <p:spPr>
+          <a:xfrm>
+            <a:off x="4680875" y="2117806"/>
+            <a:ext cx="6534150" cy="4667250"/>
+          </a:xfrm>
+          <a:prstGeom prst="rect">
+            <a:avLst/>
+          </a:prstGeom>
+        </p:spPr>
+      </p:pic>
+      <p:pic>
+        <p:nvPicPr>
+          <p:cNvPr id="2" name="Рисунок 1" descr="Изображение выглядит как текст, Легкая закуска, десерт, выпечка&#10;&#10;Содержимое, созданное искусственным интеллектом, может быть неверным.">
+            <a:extLst>
+              <a:ext uri="{FF2B5EF4-FFF2-40B4-BE49-F238E27FC236}">
+                <a16:creationId xmlns:a16="http://schemas.microsoft.com/office/drawing/2014/main" id="{5693AF93-2472-F3FA-987C-10AB71CE9C30}"/>
               </a:ext>
             </a:extLst>
           </p:cNvPr>
@@ -4684,8 +8468,1147 @@
         </p:blipFill>
         <p:spPr>
           <a:xfrm>
-            <a:off x="785256" y="2410072"/>
-            <a:ext cx="10611593" cy="4353544"/>
+            <a:off x="3810362" y="9286634"/>
+            <a:ext cx="7792898" cy="4566454"/>
+          </a:xfrm>
+          <a:prstGeom prst="rect">
+            <a:avLst/>
+          </a:prstGeom>
+        </p:spPr>
+      </p:pic>
+      <p:sp>
+        <p:nvSpPr>
+          <p:cNvPr id="4" name="Прямоугольник: скругленные углы 3">
+            <a:extLst>
+              <a:ext uri="{FF2B5EF4-FFF2-40B4-BE49-F238E27FC236}">
+                <a16:creationId xmlns:a16="http://schemas.microsoft.com/office/drawing/2014/main" id="{278135D0-BA21-4ED9-E41F-A7C3117A1DAE}"/>
+              </a:ext>
+            </a:extLst>
+          </p:cNvPr>
+          <p:cNvSpPr/>
+          <p:nvPr/>
+        </p:nvSpPr>
+        <p:spPr>
+          <a:xfrm>
+            <a:off x="253231" y="307185"/>
+            <a:ext cx="6038067" cy="1810342"/>
+          </a:xfrm>
+          <a:prstGeom prst="roundRect">
+            <a:avLst/>
+          </a:prstGeom>
+          <a:solidFill>
+            <a:srgbClr val="EDE8ED"/>
+          </a:solidFill>
+          <a:ln>
+            <a:solidFill>
+              <a:srgbClr val="EDE8ED"/>
+            </a:solidFill>
+          </a:ln>
+        </p:spPr>
+        <p:style>
+          <a:lnRef idx="2">
+            <a:schemeClr val="accent1">
+              <a:shade val="15000"/>
+            </a:schemeClr>
+          </a:lnRef>
+          <a:fillRef idx="1">
+            <a:schemeClr val="accent1"/>
+          </a:fillRef>
+          <a:effectRef idx="0">
+            <a:schemeClr val="accent1"/>
+          </a:effectRef>
+          <a:fontRef idx="minor">
+            <a:schemeClr val="lt1"/>
+          </a:fontRef>
+        </p:style>
+        <p:txBody>
+          <a:bodyPr lIns="91440" tIns="45720" rIns="91440" bIns="45720" rtlCol="0" anchor="ctr"/>
+          <a:lstStyle/>
+          <a:p>
+            <a:pPr algn="ctr"/>
+            <a:endParaRPr lang="ru-RU" dirty="0"/>
+          </a:p>
+        </p:txBody>
+      </p:sp>
+      <p:pic>
+        <p:nvPicPr>
+          <p:cNvPr id="9" name="Рисунок 8" descr="Изображение выглядит как цветок, растение, лепесток, Прострел раскрытый&#10;&#10;Содержимое, созданное искусственным интеллектом, может быть неверным.">
+            <a:extLst>
+              <a:ext uri="{FF2B5EF4-FFF2-40B4-BE49-F238E27FC236}">
+                <a16:creationId xmlns:a16="http://schemas.microsoft.com/office/drawing/2014/main" id="{4AC3BC89-F54B-1953-2668-EA6A41428A20}"/>
+              </a:ext>
+            </a:extLst>
+          </p:cNvPr>
+          <p:cNvPicPr>
+            <a:picLocks noChangeAspect="1"/>
+          </p:cNvPicPr>
+          <p:nvPr/>
+        </p:nvPicPr>
+        <p:blipFill>
+          <a:blip r:embed="rId4"/>
+          <a:stretch>
+            <a:fillRect/>
+          </a:stretch>
+        </p:blipFill>
+        <p:spPr>
+          <a:xfrm>
+            <a:off x="5654384" y="1487391"/>
+            <a:ext cx="871342" cy="933450"/>
+          </a:xfrm>
+          <a:prstGeom prst="rect">
+            <a:avLst/>
+          </a:prstGeom>
+        </p:spPr>
+      </p:pic>
+      <p:sp>
+        <p:nvSpPr>
+          <p:cNvPr id="12" name="TextBox 11">
+            <a:extLst>
+              <a:ext uri="{FF2B5EF4-FFF2-40B4-BE49-F238E27FC236}">
+                <a16:creationId xmlns:a16="http://schemas.microsoft.com/office/drawing/2014/main" id="{2B2528A3-9A01-4C0B-C2D6-5EF96391F0C3}"/>
+              </a:ext>
+            </a:extLst>
+          </p:cNvPr>
+          <p:cNvSpPr txBox="1"/>
+          <p:nvPr/>
+        </p:nvSpPr>
+        <p:spPr>
+          <a:xfrm>
+            <a:off x="378494" y="463761"/>
+            <a:ext cx="5574704" cy="1477328"/>
+          </a:xfrm>
+          <a:prstGeom prst="rect">
+            <a:avLst/>
+          </a:prstGeom>
+          <a:noFill/>
+          <a:ln>
+            <a:noFill/>
+          </a:ln>
+        </p:spPr>
+        <p:txBody>
+          <a:bodyPr rot="0" spcFirstLastPara="0" vertOverflow="overflow" horzOverflow="overflow" vert="horz" wrap="square" lIns="91440" tIns="45720" rIns="91440" bIns="45720" numCol="1" spcCol="0" rtlCol="0" fromWordArt="0" anchor="t" anchorCtr="0" forceAA="0" compatLnSpc="1">
+            <a:prstTxWarp prst="textNoShape">
+              <a:avLst/>
+            </a:prstTxWarp>
+            <a:spAutoFit/>
+          </a:bodyPr>
+          <a:lstStyle/>
+          <a:p>
+            <a:r>
+              <a:rPr lang="ru-RU">
+                <a:solidFill>
+                  <a:srgbClr val="323336"/>
+                </a:solidFill>
+              </a:rPr>
+              <a:t>Если пользователь ещё не определился с выбором блюда, он может перейти на главную страницу. Там реализована подборка популярных и новых рецептов для быстрого поиска идей и кулинарного вдохновения </a:t>
+            </a:r>
+            <a:endParaRPr lang="ru-RU" dirty="0">
+              <a:solidFill>
+                <a:srgbClr val="323336"/>
+              </a:solidFill>
+            </a:endParaRPr>
+          </a:p>
+        </p:txBody>
+      </p:sp>
+      <p:sp>
+        <p:nvSpPr>
+          <p:cNvPr id="3" name="Прямоугольник: скругленные углы 2">
+            <a:extLst>
+              <a:ext uri="{FF2B5EF4-FFF2-40B4-BE49-F238E27FC236}">
+                <a16:creationId xmlns:a16="http://schemas.microsoft.com/office/drawing/2014/main" id="{16C18225-FC5E-1E53-142F-C6B8373BE06B}"/>
+              </a:ext>
+            </a:extLst>
+          </p:cNvPr>
+          <p:cNvSpPr/>
+          <p:nvPr/>
+        </p:nvSpPr>
+        <p:spPr>
+          <a:xfrm>
+            <a:off x="-4656365" y="2679995"/>
+            <a:ext cx="4215055" cy="1810342"/>
+          </a:xfrm>
+          <a:prstGeom prst="roundRect">
+            <a:avLst/>
+          </a:prstGeom>
+          <a:solidFill>
+            <a:srgbClr val="EDE8ED"/>
+          </a:solidFill>
+          <a:ln>
+            <a:solidFill>
+              <a:srgbClr val="EDE8ED"/>
+            </a:solidFill>
+          </a:ln>
+        </p:spPr>
+        <p:style>
+          <a:lnRef idx="2">
+            <a:schemeClr val="accent1">
+              <a:shade val="15000"/>
+            </a:schemeClr>
+          </a:lnRef>
+          <a:fillRef idx="1">
+            <a:schemeClr val="accent1"/>
+          </a:fillRef>
+          <a:effectRef idx="0">
+            <a:schemeClr val="accent1"/>
+          </a:effectRef>
+          <a:fontRef idx="minor">
+            <a:schemeClr val="lt1"/>
+          </a:fontRef>
+        </p:style>
+        <p:txBody>
+          <a:bodyPr lIns="91440" tIns="45720" rIns="91440" bIns="45720" rtlCol="0" anchor="ctr"/>
+          <a:lstStyle/>
+          <a:p>
+            <a:pPr algn="ctr"/>
+            <a:endParaRPr lang="ru-RU" dirty="0"/>
+          </a:p>
+        </p:txBody>
+      </p:sp>
+      <p:sp>
+        <p:nvSpPr>
+          <p:cNvPr id="6" name="TextBox 5">
+            <a:extLst>
+              <a:ext uri="{FF2B5EF4-FFF2-40B4-BE49-F238E27FC236}">
+                <a16:creationId xmlns:a16="http://schemas.microsoft.com/office/drawing/2014/main" id="{86A2E8F6-A420-2EC7-51E1-25110B7B6090}"/>
+              </a:ext>
+            </a:extLst>
+          </p:cNvPr>
+          <p:cNvSpPr txBox="1"/>
+          <p:nvPr/>
+        </p:nvSpPr>
+        <p:spPr>
+          <a:xfrm>
+            <a:off x="-4592217" y="2678958"/>
+            <a:ext cx="4083932" cy="1815882"/>
+          </a:xfrm>
+          <a:prstGeom prst="rect">
+            <a:avLst/>
+          </a:prstGeom>
+          <a:noFill/>
+        </p:spPr>
+        <p:txBody>
+          <a:bodyPr rot="0" spcFirstLastPara="0" vertOverflow="overflow" horzOverflow="overflow" vert="horz" wrap="square" lIns="91440" tIns="45720" rIns="91440" bIns="45720" numCol="1" spcCol="0" rtlCol="0" fromWordArt="0" anchor="t" anchorCtr="0" forceAA="0" compatLnSpc="1">
+            <a:prstTxWarp prst="textNoShape">
+              <a:avLst/>
+            </a:prstTxWarp>
+            <a:spAutoFit/>
+          </a:bodyPr>
+          <a:lstStyle/>
+          <a:p>
+            <a:r>
+              <a:rPr lang="ru-RU" sz="1600">
+                <a:solidFill>
+                  <a:srgbClr val="323336"/>
+                </a:solidFill>
+                <a:ea typeface="+mn-lt"/>
+                <a:cs typeface="+mn-lt"/>
+              </a:rPr>
+              <a:t>Кнопка "Посмотреть рецепт" открывает доступ к инструкции и полной информации о рецепте. Дополнительно предусмотрена функция подписки на автора, что позволяет формировать персонализированную ленту и следить за обновлениями</a:t>
+            </a:r>
+          </a:p>
+        </p:txBody>
+      </p:sp>
+    </p:spTree>
+    <p:extLst>
+      <p:ext uri="{BB962C8B-B14F-4D97-AF65-F5344CB8AC3E}">
+        <p14:creationId xmlns:p14="http://schemas.microsoft.com/office/powerpoint/2010/main" val="1279068675"/>
+      </p:ext>
+    </p:extLst>
+  </p:cSld>
+  <p:clrMapOvr>
+    <a:masterClrMapping/>
+  </p:clrMapOvr>
+  <mc:AlternateContent xmlns:mc="http://schemas.openxmlformats.org/markup-compatibility/2006">
+    <mc:Choice xmlns:p159="http://schemas.microsoft.com/office/powerpoint/2015/09/main" Requires="p159">
+      <p:transition xmlns:p14="http://schemas.microsoft.com/office/powerpoint/2010/main" spd="slow" p14:dur="2000">
+        <p159:morph option="byObject"/>
+      </p:transition>
+    </mc:Choice>
+    <mc:Fallback>
+      <p:transition spd="slow">
+        <p:fade/>
+      </p:transition>
+    </mc:Fallback>
+  </mc:AlternateContent>
+</p:sld>
+</file>
+
+<file path=ppt/slides/slide7.xml><?xml version="1.0" encoding="utf-8"?>
+<p:sld xmlns:a="http://schemas.openxmlformats.org/drawingml/2006/main" xmlns:r="http://schemas.openxmlformats.org/officeDocument/2006/relationships" xmlns:p="http://schemas.openxmlformats.org/presentationml/2006/main">
+  <p:cSld>
+    <p:spTree>
+      <p:nvGrpSpPr>
+        <p:cNvPr id="1" name="">
+          <a:extLst>
+            <a:ext uri="{FF2B5EF4-FFF2-40B4-BE49-F238E27FC236}">
+              <a16:creationId xmlns:a16="http://schemas.microsoft.com/office/drawing/2014/main" id="{C9E3750E-D3FE-D8D7-225C-52371123EC6A}"/>
+            </a:ext>
+          </a:extLst>
+        </p:cNvPr>
+        <p:cNvGrpSpPr/>
+        <p:nvPr/>
+      </p:nvGrpSpPr>
+      <p:grpSpPr>
+        <a:xfrm>
+          <a:off x="0" y="0"/>
+          <a:ext cx="0" cy="0"/>
+          <a:chOff x="0" y="0"/>
+          <a:chExt cx="0" cy="0"/>
+        </a:xfrm>
+      </p:grpSpPr>
+      <p:pic>
+        <p:nvPicPr>
+          <p:cNvPr id="5" name="Рисунок 4" descr="Изображение выглядит как текст, выпечка, десерт, Легкая закуска&#10;&#10;Содержимое, созданное искусственным интеллектом, может быть неверным.">
+            <a:extLst>
+              <a:ext uri="{FF2B5EF4-FFF2-40B4-BE49-F238E27FC236}">
+                <a16:creationId xmlns:a16="http://schemas.microsoft.com/office/drawing/2014/main" id="{6C95B6E4-86F9-B5C3-A2AC-9A4ADCB58460}"/>
+              </a:ext>
+            </a:extLst>
+          </p:cNvPr>
+          <p:cNvPicPr>
+            <a:picLocks noChangeAspect="1"/>
+          </p:cNvPicPr>
+          <p:nvPr/>
+        </p:nvPicPr>
+        <p:blipFill>
+          <a:blip r:embed="rId2"/>
+          <a:stretch>
+            <a:fillRect/>
+          </a:stretch>
+        </p:blipFill>
+        <p:spPr>
+          <a:xfrm>
+            <a:off x="4680875" y="2117806"/>
+            <a:ext cx="6534150" cy="4667250"/>
+          </a:xfrm>
+          <a:prstGeom prst="rect">
+            <a:avLst/>
+          </a:prstGeom>
+        </p:spPr>
+      </p:pic>
+      <p:pic>
+        <p:nvPicPr>
+          <p:cNvPr id="2" name="Рисунок 1" descr="Изображение выглядит как текст, Легкая закуска, десерт, выпечка&#10;&#10;Содержимое, созданное искусственным интеллектом, может быть неверным.">
+            <a:extLst>
+              <a:ext uri="{FF2B5EF4-FFF2-40B4-BE49-F238E27FC236}">
+                <a16:creationId xmlns:a16="http://schemas.microsoft.com/office/drawing/2014/main" id="{F17CAEC3-1512-03EE-E448-5B39C01CC7EB}"/>
+              </a:ext>
+            </a:extLst>
+          </p:cNvPr>
+          <p:cNvPicPr>
+            <a:picLocks noChangeAspect="1"/>
+          </p:cNvPicPr>
+          <p:nvPr/>
+        </p:nvPicPr>
+        <p:blipFill>
+          <a:blip r:embed="rId3"/>
+          <a:stretch>
+            <a:fillRect/>
+          </a:stretch>
+        </p:blipFill>
+        <p:spPr>
+          <a:xfrm>
+            <a:off x="3810362" y="9286634"/>
+            <a:ext cx="7792898" cy="4566454"/>
+          </a:xfrm>
+          <a:prstGeom prst="rect">
+            <a:avLst/>
+          </a:prstGeom>
+        </p:spPr>
+      </p:pic>
+      <p:sp>
+        <p:nvSpPr>
+          <p:cNvPr id="4" name="Прямоугольник: скругленные углы 3">
+            <a:extLst>
+              <a:ext uri="{FF2B5EF4-FFF2-40B4-BE49-F238E27FC236}">
+                <a16:creationId xmlns:a16="http://schemas.microsoft.com/office/drawing/2014/main" id="{68361B42-961C-7AAD-87A4-F061324B554B}"/>
+              </a:ext>
+            </a:extLst>
+          </p:cNvPr>
+          <p:cNvSpPr/>
+          <p:nvPr/>
+        </p:nvSpPr>
+        <p:spPr>
+          <a:xfrm>
+            <a:off x="253231" y="307185"/>
+            <a:ext cx="6038067" cy="1810342"/>
+          </a:xfrm>
+          <a:prstGeom prst="roundRect">
+            <a:avLst/>
+          </a:prstGeom>
+          <a:solidFill>
+            <a:srgbClr val="EDE8ED"/>
+          </a:solidFill>
+          <a:ln>
+            <a:solidFill>
+              <a:srgbClr val="EDE8ED"/>
+            </a:solidFill>
+          </a:ln>
+        </p:spPr>
+        <p:style>
+          <a:lnRef idx="2">
+            <a:schemeClr val="accent1">
+              <a:shade val="15000"/>
+            </a:schemeClr>
+          </a:lnRef>
+          <a:fillRef idx="1">
+            <a:schemeClr val="accent1"/>
+          </a:fillRef>
+          <a:effectRef idx="0">
+            <a:schemeClr val="accent1"/>
+          </a:effectRef>
+          <a:fontRef idx="minor">
+            <a:schemeClr val="lt1"/>
+          </a:fontRef>
+        </p:style>
+        <p:txBody>
+          <a:bodyPr lIns="91440" tIns="45720" rIns="91440" bIns="45720" rtlCol="0" anchor="ctr"/>
+          <a:lstStyle/>
+          <a:p>
+            <a:pPr algn="ctr"/>
+            <a:endParaRPr lang="ru-RU" dirty="0"/>
+          </a:p>
+        </p:txBody>
+      </p:sp>
+      <p:pic>
+        <p:nvPicPr>
+          <p:cNvPr id="9" name="Рисунок 8" descr="Изображение выглядит как цветок, растение, лепесток, Прострел раскрытый&#10;&#10;Содержимое, созданное искусственным интеллектом, может быть неверным.">
+            <a:extLst>
+              <a:ext uri="{FF2B5EF4-FFF2-40B4-BE49-F238E27FC236}">
+                <a16:creationId xmlns:a16="http://schemas.microsoft.com/office/drawing/2014/main" id="{5043CF8A-517A-0DCB-299F-8B431941DE01}"/>
+              </a:ext>
+            </a:extLst>
+          </p:cNvPr>
+          <p:cNvPicPr>
+            <a:picLocks noChangeAspect="1"/>
+          </p:cNvPicPr>
+          <p:nvPr/>
+        </p:nvPicPr>
+        <p:blipFill>
+          <a:blip r:embed="rId4"/>
+          <a:stretch>
+            <a:fillRect/>
+          </a:stretch>
+        </p:blipFill>
+        <p:spPr>
+          <a:xfrm>
+            <a:off x="5654384" y="1487391"/>
+            <a:ext cx="871342" cy="933450"/>
+          </a:xfrm>
+          <a:prstGeom prst="rect">
+            <a:avLst/>
+          </a:prstGeom>
+        </p:spPr>
+      </p:pic>
+      <p:sp>
+        <p:nvSpPr>
+          <p:cNvPr id="12" name="TextBox 11">
+            <a:extLst>
+              <a:ext uri="{FF2B5EF4-FFF2-40B4-BE49-F238E27FC236}">
+                <a16:creationId xmlns:a16="http://schemas.microsoft.com/office/drawing/2014/main" id="{C817A6F1-D193-EED0-9838-D6D237483527}"/>
+              </a:ext>
+            </a:extLst>
+          </p:cNvPr>
+          <p:cNvSpPr txBox="1"/>
+          <p:nvPr/>
+        </p:nvSpPr>
+        <p:spPr>
+          <a:xfrm>
+            <a:off x="378494" y="463761"/>
+            <a:ext cx="5574704" cy="1477328"/>
+          </a:xfrm>
+          <a:prstGeom prst="rect">
+            <a:avLst/>
+          </a:prstGeom>
+          <a:noFill/>
+          <a:ln>
+            <a:noFill/>
+          </a:ln>
+        </p:spPr>
+        <p:txBody>
+          <a:bodyPr rot="0" spcFirstLastPara="0" vertOverflow="overflow" horzOverflow="overflow" vert="horz" wrap="square" lIns="91440" tIns="45720" rIns="91440" bIns="45720" numCol="1" spcCol="0" rtlCol="0" fromWordArt="0" anchor="t" anchorCtr="0" forceAA="0" compatLnSpc="1">
+            <a:prstTxWarp prst="textNoShape">
+              <a:avLst/>
+            </a:prstTxWarp>
+            <a:spAutoFit/>
+          </a:bodyPr>
+          <a:lstStyle/>
+          <a:p>
+            <a:r>
+              <a:rPr lang="ru-RU">
+                <a:solidFill>
+                  <a:srgbClr val="323336"/>
+                </a:solidFill>
+              </a:rPr>
+              <a:t>Если пользователь ещё не определился с выбором блюда, он может перейти на главную страницу. Там реализована подборка популярных и новых рецептов для быстрого поиска идей и кулинарного вдохновения </a:t>
+            </a:r>
+            <a:endParaRPr lang="ru-RU" dirty="0">
+              <a:solidFill>
+                <a:srgbClr val="323336"/>
+              </a:solidFill>
+            </a:endParaRPr>
+          </a:p>
+        </p:txBody>
+      </p:sp>
+      <p:sp>
+        <p:nvSpPr>
+          <p:cNvPr id="3" name="Прямоугольник: скругленные углы 2">
+            <a:extLst>
+              <a:ext uri="{FF2B5EF4-FFF2-40B4-BE49-F238E27FC236}">
+                <a16:creationId xmlns:a16="http://schemas.microsoft.com/office/drawing/2014/main" id="{5574343E-74FF-461E-B9DE-759719F5E5AA}"/>
+              </a:ext>
+            </a:extLst>
+          </p:cNvPr>
+          <p:cNvSpPr/>
+          <p:nvPr/>
+        </p:nvSpPr>
+        <p:spPr>
+          <a:xfrm>
+            <a:off x="253230" y="2631767"/>
+            <a:ext cx="4215055" cy="1810342"/>
+          </a:xfrm>
+          <a:prstGeom prst="roundRect">
+            <a:avLst/>
+          </a:prstGeom>
+          <a:solidFill>
+            <a:srgbClr val="EDE8ED"/>
+          </a:solidFill>
+          <a:ln>
+            <a:solidFill>
+              <a:srgbClr val="EDE8ED"/>
+            </a:solidFill>
+          </a:ln>
+        </p:spPr>
+        <p:style>
+          <a:lnRef idx="2">
+            <a:schemeClr val="accent1">
+              <a:shade val="15000"/>
+            </a:schemeClr>
+          </a:lnRef>
+          <a:fillRef idx="1">
+            <a:schemeClr val="accent1"/>
+          </a:fillRef>
+          <a:effectRef idx="0">
+            <a:schemeClr val="accent1"/>
+          </a:effectRef>
+          <a:fontRef idx="minor">
+            <a:schemeClr val="lt1"/>
+          </a:fontRef>
+        </p:style>
+        <p:txBody>
+          <a:bodyPr lIns="91440" tIns="45720" rIns="91440" bIns="45720" rtlCol="0" anchor="ctr"/>
+          <a:lstStyle/>
+          <a:p>
+            <a:pPr algn="ctr"/>
+            <a:endParaRPr lang="ru-RU" dirty="0"/>
+          </a:p>
+        </p:txBody>
+      </p:sp>
+      <p:sp>
+        <p:nvSpPr>
+          <p:cNvPr id="6" name="TextBox 5">
+            <a:extLst>
+              <a:ext uri="{FF2B5EF4-FFF2-40B4-BE49-F238E27FC236}">
+                <a16:creationId xmlns:a16="http://schemas.microsoft.com/office/drawing/2014/main" id="{A08DFA89-9F5A-2ACD-AA96-A19A4B364270}"/>
+              </a:ext>
+            </a:extLst>
+          </p:cNvPr>
+          <p:cNvSpPr txBox="1"/>
+          <p:nvPr/>
+        </p:nvSpPr>
+        <p:spPr>
+          <a:xfrm>
+            <a:off x="317378" y="2630730"/>
+            <a:ext cx="4083932" cy="1815882"/>
+          </a:xfrm>
+          <a:prstGeom prst="rect">
+            <a:avLst/>
+          </a:prstGeom>
+          <a:noFill/>
+        </p:spPr>
+        <p:txBody>
+          <a:bodyPr rot="0" spcFirstLastPara="0" vertOverflow="overflow" horzOverflow="overflow" vert="horz" wrap="square" lIns="91440" tIns="45720" rIns="91440" bIns="45720" numCol="1" spcCol="0" rtlCol="0" fromWordArt="0" anchor="t" anchorCtr="0" forceAA="0" compatLnSpc="1">
+            <a:prstTxWarp prst="textNoShape">
+              <a:avLst/>
+            </a:prstTxWarp>
+            <a:spAutoFit/>
+          </a:bodyPr>
+          <a:lstStyle/>
+          <a:p>
+            <a:r>
+              <a:rPr lang="ru-RU" sz="1600">
+                <a:solidFill>
+                  <a:srgbClr val="323336"/>
+                </a:solidFill>
+                <a:ea typeface="+mn-lt"/>
+                <a:cs typeface="+mn-lt"/>
+              </a:rPr>
+              <a:t>Кнопка "Посмотреть рецепт" открывает доступ к инструкции и полной информации о рецепте. Дополнительно предусмотрена функция подписки на автора, что позволяет формировать персонализированную ленту и следить за обновлениями</a:t>
+            </a:r>
+          </a:p>
+        </p:txBody>
+      </p:sp>
+    </p:spTree>
+    <p:extLst>
+      <p:ext uri="{BB962C8B-B14F-4D97-AF65-F5344CB8AC3E}">
+        <p14:creationId xmlns:p14="http://schemas.microsoft.com/office/powerpoint/2010/main" val="3692258906"/>
+      </p:ext>
+    </p:extLst>
+  </p:cSld>
+  <p:clrMapOvr>
+    <a:masterClrMapping/>
+  </p:clrMapOvr>
+  <mc:AlternateContent xmlns:mc="http://schemas.openxmlformats.org/markup-compatibility/2006">
+    <mc:Choice xmlns:p159="http://schemas.microsoft.com/office/powerpoint/2015/09/main" Requires="p159">
+      <p:transition xmlns:p14="http://schemas.microsoft.com/office/powerpoint/2010/main" spd="slow" p14:dur="2000">
+        <p159:morph option="byObject"/>
+      </p:transition>
+    </mc:Choice>
+    <mc:Fallback>
+      <p:transition spd="slow">
+        <p:fade/>
+      </p:transition>
+    </mc:Fallback>
+  </mc:AlternateContent>
+</p:sld>
+</file>
+
+<file path=ppt/slides/slide8.xml><?xml version="1.0" encoding="utf-8"?>
+<p:sld xmlns:a="http://schemas.openxmlformats.org/drawingml/2006/main" xmlns:r="http://schemas.openxmlformats.org/officeDocument/2006/relationships" xmlns:p="http://schemas.openxmlformats.org/presentationml/2006/main">
+  <p:cSld>
+    <p:spTree>
+      <p:nvGrpSpPr>
+        <p:cNvPr id="1" name=""/>
+        <p:cNvGrpSpPr/>
+        <p:nvPr/>
+      </p:nvGrpSpPr>
+      <p:grpSpPr>
+        <a:xfrm>
+          <a:off x="0" y="0"/>
+          <a:ext cx="0" cy="0"/>
+          <a:chOff x="0" y="0"/>
+          <a:chExt cx="0" cy="0"/>
+        </a:xfrm>
+      </p:grpSpPr>
+      <p:pic>
+        <p:nvPicPr>
+          <p:cNvPr id="2" name="Рисунок 1" descr="Изображение выглядит как текст, Легкая закуска, меню, еда&#10;&#10;Содержимое, созданное искусственным интеллектом, может быть неверным.">
+            <a:extLst>
+              <a:ext uri="{FF2B5EF4-FFF2-40B4-BE49-F238E27FC236}">
+                <a16:creationId xmlns:a16="http://schemas.microsoft.com/office/drawing/2014/main" id="{8C673457-3794-B97D-65F4-BB9000494BB7}"/>
+              </a:ext>
+            </a:extLst>
+          </p:cNvPr>
+          <p:cNvPicPr>
+            <a:picLocks noChangeAspect="1"/>
+          </p:cNvPicPr>
+          <p:nvPr/>
+        </p:nvPicPr>
+        <p:blipFill>
+          <a:blip r:embed="rId2"/>
+          <a:stretch>
+            <a:fillRect/>
+          </a:stretch>
+        </p:blipFill>
+        <p:spPr>
+          <a:xfrm>
+            <a:off x="147121" y="0"/>
+            <a:ext cx="7993811" cy="6858000"/>
+          </a:xfrm>
+          <a:prstGeom prst="rect">
+            <a:avLst/>
+          </a:prstGeom>
+        </p:spPr>
+      </p:pic>
+      <p:sp>
+        <p:nvSpPr>
+          <p:cNvPr id="4" name="Прямоугольник: скругленные углы 3">
+            <a:extLst>
+              <a:ext uri="{FF2B5EF4-FFF2-40B4-BE49-F238E27FC236}">
+                <a16:creationId xmlns:a16="http://schemas.microsoft.com/office/drawing/2014/main" id="{254C622E-D274-F026-6AC3-E53CE7CCD255}"/>
+              </a:ext>
+            </a:extLst>
+          </p:cNvPr>
+          <p:cNvSpPr/>
+          <p:nvPr/>
+        </p:nvSpPr>
+        <p:spPr>
+          <a:xfrm>
+            <a:off x="8144629" y="77542"/>
+            <a:ext cx="3898204" cy="3344780"/>
+          </a:xfrm>
+          <a:prstGeom prst="roundRect">
+            <a:avLst/>
+          </a:prstGeom>
+          <a:solidFill>
+            <a:srgbClr val="EDE8ED"/>
+          </a:solidFill>
+          <a:ln>
+            <a:solidFill>
+              <a:srgbClr val="EDE8ED"/>
+            </a:solidFill>
+          </a:ln>
+        </p:spPr>
+        <p:style>
+          <a:lnRef idx="2">
+            <a:schemeClr val="accent1">
+              <a:shade val="15000"/>
+            </a:schemeClr>
+          </a:lnRef>
+          <a:fillRef idx="1">
+            <a:schemeClr val="accent1"/>
+          </a:fillRef>
+          <a:effectRef idx="0">
+            <a:schemeClr val="accent1"/>
+          </a:effectRef>
+          <a:fontRef idx="minor">
+            <a:schemeClr val="lt1"/>
+          </a:fontRef>
+        </p:style>
+        <p:txBody>
+          <a:bodyPr lIns="91440" tIns="45720" rIns="91440" bIns="45720" rtlCol="0" anchor="ctr"/>
+          <a:lstStyle/>
+          <a:p>
+            <a:pPr algn="ctr"/>
+            <a:endParaRPr lang="ru-RU" dirty="0"/>
+          </a:p>
+        </p:txBody>
+      </p:sp>
+      <p:sp>
+        <p:nvSpPr>
+          <p:cNvPr id="5" name="TextBox 4">
+            <a:extLst>
+              <a:ext uri="{FF2B5EF4-FFF2-40B4-BE49-F238E27FC236}">
+                <a16:creationId xmlns:a16="http://schemas.microsoft.com/office/drawing/2014/main" id="{970DE371-9067-9D11-E086-DF2754D9A94F}"/>
+              </a:ext>
+            </a:extLst>
+          </p:cNvPr>
+          <p:cNvSpPr txBox="1"/>
+          <p:nvPr/>
+        </p:nvSpPr>
+        <p:spPr>
+          <a:xfrm>
+            <a:off x="8361122" y="386218"/>
+            <a:ext cx="3463446" cy="3139321"/>
+          </a:xfrm>
+          <a:prstGeom prst="rect">
+            <a:avLst/>
+          </a:prstGeom>
+          <a:noFill/>
+        </p:spPr>
+        <p:txBody>
+          <a:bodyPr rot="0" spcFirstLastPara="0" vertOverflow="overflow" horzOverflow="overflow" vert="horz" wrap="square" lIns="91440" tIns="45720" rIns="91440" bIns="45720" numCol="1" spcCol="0" rtlCol="0" fromWordArt="0" anchor="ctr" anchorCtr="0" forceAA="0" compatLnSpc="1">
+            <a:prstTxWarp prst="textNoShape">
+              <a:avLst/>
+            </a:prstTxWarp>
+            <a:spAutoFit/>
+          </a:bodyPr>
+          <a:lstStyle/>
+          <a:p>
+            <a:pPr algn="ctr"/>
+            <a:r>
+              <a:rPr lang="ru-RU">
+                <a:solidFill>
+                  <a:srgbClr val="323336"/>
+                </a:solidFill>
+                <a:ea typeface="+mn-lt"/>
+                <a:cs typeface="+mn-lt"/>
+              </a:rPr>
+              <a:t>Интерфейс карточки отображает все ключевые параметры рецепта для упрощения выбора. Наличие метрики лайков позволяет пользователю мгновенно оценить востребованность рецепта и актуальность предложенных кулинарных решений</a:t>
+            </a:r>
+            <a:endParaRPr lang="ru-RU"/>
+          </a:p>
+          <a:p>
+            <a:pPr algn="l"/>
+            <a:endParaRPr lang="ru-RU" dirty="0">
+              <a:solidFill>
+                <a:srgbClr val="323336"/>
+              </a:solidFill>
+              <a:ea typeface="+mn-lt"/>
+              <a:cs typeface="+mn-lt"/>
+            </a:endParaRPr>
+          </a:p>
+        </p:txBody>
+      </p:sp>
+      <p:sp>
+        <p:nvSpPr>
+          <p:cNvPr id="6" name="Прямоугольник: скругленные углы 5">
+            <a:extLst>
+              <a:ext uri="{FF2B5EF4-FFF2-40B4-BE49-F238E27FC236}">
+                <a16:creationId xmlns:a16="http://schemas.microsoft.com/office/drawing/2014/main" id="{D505FD83-2649-F8C9-3D2D-3563F2355BC3}"/>
+              </a:ext>
+            </a:extLst>
+          </p:cNvPr>
+          <p:cNvSpPr/>
+          <p:nvPr/>
+        </p:nvSpPr>
+        <p:spPr>
+          <a:xfrm>
+            <a:off x="8144628" y="7248691"/>
+            <a:ext cx="3898204" cy="3240397"/>
+          </a:xfrm>
+          <a:prstGeom prst="roundRect">
+            <a:avLst/>
+          </a:prstGeom>
+          <a:solidFill>
+            <a:srgbClr val="EDE8ED"/>
+          </a:solidFill>
+          <a:ln>
+            <a:solidFill>
+              <a:srgbClr val="EDE8ED"/>
+            </a:solidFill>
+          </a:ln>
+        </p:spPr>
+        <p:style>
+          <a:lnRef idx="2">
+            <a:schemeClr val="accent1">
+              <a:shade val="15000"/>
+            </a:schemeClr>
+          </a:lnRef>
+          <a:fillRef idx="1">
+            <a:schemeClr val="accent1"/>
+          </a:fillRef>
+          <a:effectRef idx="0">
+            <a:schemeClr val="accent1"/>
+          </a:effectRef>
+          <a:fontRef idx="minor">
+            <a:schemeClr val="lt1"/>
+          </a:fontRef>
+        </p:style>
+        <p:txBody>
+          <a:bodyPr lIns="91440" tIns="45720" rIns="91440" bIns="45720" rtlCol="0" anchor="ctr"/>
+          <a:lstStyle/>
+          <a:p>
+            <a:pPr algn="ctr"/>
+            <a:endParaRPr lang="ru-RU" dirty="0"/>
+          </a:p>
+        </p:txBody>
+      </p:sp>
+      <p:sp>
+        <p:nvSpPr>
+          <p:cNvPr id="7" name="TextBox 6">
+            <a:extLst>
+              <a:ext uri="{FF2B5EF4-FFF2-40B4-BE49-F238E27FC236}">
+                <a16:creationId xmlns:a16="http://schemas.microsoft.com/office/drawing/2014/main" id="{59A70D9D-9273-DCBB-B891-435B03EF996B}"/>
+              </a:ext>
+            </a:extLst>
+          </p:cNvPr>
+          <p:cNvSpPr txBox="1"/>
+          <p:nvPr/>
+        </p:nvSpPr>
+        <p:spPr>
+          <a:xfrm>
+            <a:off x="8141918" y="7438476"/>
+            <a:ext cx="3901855" cy="3139321"/>
+          </a:xfrm>
+          <a:prstGeom prst="rect">
+            <a:avLst/>
+          </a:prstGeom>
+          <a:noFill/>
+        </p:spPr>
+        <p:txBody>
+          <a:bodyPr rot="0" spcFirstLastPara="0" vertOverflow="overflow" horzOverflow="overflow" vert="horz" wrap="square" lIns="91440" tIns="45720" rIns="91440" bIns="45720" numCol="1" spcCol="0" rtlCol="0" fromWordArt="0" anchor="ctr" anchorCtr="0" forceAA="0" compatLnSpc="1">
+            <a:prstTxWarp prst="textNoShape">
+              <a:avLst/>
+            </a:prstTxWarp>
+            <a:spAutoFit/>
+          </a:bodyPr>
+          <a:lstStyle/>
+          <a:p>
+            <a:pPr algn="ctr"/>
+            <a:r>
+              <a:rPr lang="ru-RU">
+                <a:solidFill>
+                  <a:srgbClr val="323336"/>
+                </a:solidFill>
+                <a:ea typeface="+mn-lt"/>
+                <a:cs typeface="+mn-lt"/>
+              </a:rPr>
+              <a:t>В нижней части страницы реализован блок комментариев. Это пространство для коммуникации пользователей, где они могут не только обсудить рецепт, но и поделиться практическими советами по приготовлению, адаптации ингредиентов или секретами личного кулинарного опыта</a:t>
+            </a:r>
+            <a:endParaRPr lang="ru-RU"/>
+          </a:p>
+          <a:p>
+            <a:pPr algn="l"/>
+            <a:endParaRPr lang="ru-RU" dirty="0"/>
+          </a:p>
+        </p:txBody>
+      </p:sp>
+    </p:spTree>
+    <p:extLst>
+      <p:ext uri="{BB962C8B-B14F-4D97-AF65-F5344CB8AC3E}">
+        <p14:creationId xmlns:p14="http://schemas.microsoft.com/office/powerpoint/2010/main" val="1916644999"/>
+      </p:ext>
+    </p:extLst>
+  </p:cSld>
+  <p:clrMapOvr>
+    <a:masterClrMapping/>
+  </p:clrMapOvr>
+</p:sld>
+</file>
+
+<file path=ppt/slides/slide9.xml><?xml version="1.0" encoding="utf-8"?>
+<p:sld xmlns:a="http://schemas.openxmlformats.org/drawingml/2006/main" xmlns:r="http://schemas.openxmlformats.org/officeDocument/2006/relationships" xmlns:p="http://schemas.openxmlformats.org/presentationml/2006/main">
+  <p:cSld>
+    <p:spTree>
+      <p:nvGrpSpPr>
+        <p:cNvPr id="1" name="">
+          <a:extLst>
+            <a:ext uri="{FF2B5EF4-FFF2-40B4-BE49-F238E27FC236}">
+              <a16:creationId xmlns:a16="http://schemas.microsoft.com/office/drawing/2014/main" id="{05FB6317-965A-2F52-6ED3-55E0E7B58B0C}"/>
+            </a:ext>
+          </a:extLst>
+        </p:cNvPr>
+        <p:cNvGrpSpPr/>
+        <p:nvPr/>
+      </p:nvGrpSpPr>
+      <p:grpSpPr>
+        <a:xfrm>
+          <a:off x="0" y="0"/>
+          <a:ext cx="0" cy="0"/>
+          <a:chOff x="0" y="0"/>
+          <a:chExt cx="0" cy="0"/>
+        </a:xfrm>
+      </p:grpSpPr>
+      <p:sp>
+        <p:nvSpPr>
+          <p:cNvPr id="4" name="Прямоугольник: скругленные углы 3">
+            <a:extLst>
+              <a:ext uri="{FF2B5EF4-FFF2-40B4-BE49-F238E27FC236}">
+                <a16:creationId xmlns:a16="http://schemas.microsoft.com/office/drawing/2014/main" id="{A840F3D7-A8CA-02BF-34AC-A9B5E6613569}"/>
+              </a:ext>
+            </a:extLst>
+          </p:cNvPr>
+          <p:cNvSpPr/>
+          <p:nvPr/>
+        </p:nvSpPr>
+        <p:spPr>
+          <a:xfrm>
+            <a:off x="8144629" y="77542"/>
+            <a:ext cx="3898204" cy="3344780"/>
+          </a:xfrm>
+          <a:prstGeom prst="roundRect">
+            <a:avLst/>
+          </a:prstGeom>
+          <a:solidFill>
+            <a:srgbClr val="EDE8ED"/>
+          </a:solidFill>
+          <a:ln>
+            <a:solidFill>
+              <a:srgbClr val="EDE8ED"/>
+            </a:solidFill>
+          </a:ln>
+        </p:spPr>
+        <p:style>
+          <a:lnRef idx="2">
+            <a:schemeClr val="accent1">
+              <a:shade val="15000"/>
+            </a:schemeClr>
+          </a:lnRef>
+          <a:fillRef idx="1">
+            <a:schemeClr val="accent1"/>
+          </a:fillRef>
+          <a:effectRef idx="0">
+            <a:schemeClr val="accent1"/>
+          </a:effectRef>
+          <a:fontRef idx="minor">
+            <a:schemeClr val="lt1"/>
+          </a:fontRef>
+        </p:style>
+        <p:txBody>
+          <a:bodyPr lIns="91440" tIns="45720" rIns="91440" bIns="45720" rtlCol="0" anchor="ctr"/>
+          <a:lstStyle/>
+          <a:p>
+            <a:pPr algn="ctr"/>
+            <a:endParaRPr lang="ru-RU" dirty="0"/>
+          </a:p>
+        </p:txBody>
+      </p:sp>
+      <p:sp>
+        <p:nvSpPr>
+          <p:cNvPr id="5" name="TextBox 4">
+            <a:extLst>
+              <a:ext uri="{FF2B5EF4-FFF2-40B4-BE49-F238E27FC236}">
+                <a16:creationId xmlns:a16="http://schemas.microsoft.com/office/drawing/2014/main" id="{D5F279D9-4508-48CD-A33B-DE72C7253611}"/>
+              </a:ext>
+            </a:extLst>
+          </p:cNvPr>
+          <p:cNvSpPr txBox="1"/>
+          <p:nvPr/>
+        </p:nvSpPr>
+        <p:spPr>
+          <a:xfrm>
+            <a:off x="8361122" y="386218"/>
+            <a:ext cx="3463446" cy="3139321"/>
+          </a:xfrm>
+          <a:prstGeom prst="rect">
+            <a:avLst/>
+          </a:prstGeom>
+          <a:noFill/>
+        </p:spPr>
+        <p:txBody>
+          <a:bodyPr rot="0" spcFirstLastPara="0" vertOverflow="overflow" horzOverflow="overflow" vert="horz" wrap="square" lIns="91440" tIns="45720" rIns="91440" bIns="45720" numCol="1" spcCol="0" rtlCol="0" fromWordArt="0" anchor="ctr" anchorCtr="0" forceAA="0" compatLnSpc="1">
+            <a:prstTxWarp prst="textNoShape">
+              <a:avLst/>
+            </a:prstTxWarp>
+            <a:spAutoFit/>
+          </a:bodyPr>
+          <a:lstStyle/>
+          <a:p>
+            <a:pPr algn="ctr"/>
+            <a:r>
+              <a:rPr lang="ru-RU">
+                <a:solidFill>
+                  <a:srgbClr val="323336"/>
+                </a:solidFill>
+                <a:ea typeface="+mn-lt"/>
+                <a:cs typeface="+mn-lt"/>
+              </a:rPr>
+              <a:t>Интерфейс карточки отображает все ключевые параметры рецепта для упрощения выбора. Наличие метрики лайков позволяет пользователю мгновенно оценить востребованность рецепта и актуальность предложенных кулинарных решений</a:t>
+            </a:r>
+            <a:endParaRPr lang="ru-RU"/>
+          </a:p>
+          <a:p>
+            <a:pPr algn="l"/>
+            <a:endParaRPr lang="ru-RU" dirty="0">
+              <a:solidFill>
+                <a:srgbClr val="323336"/>
+              </a:solidFill>
+              <a:ea typeface="+mn-lt"/>
+              <a:cs typeface="+mn-lt"/>
+            </a:endParaRPr>
+          </a:p>
+        </p:txBody>
+      </p:sp>
+      <p:sp>
+        <p:nvSpPr>
+          <p:cNvPr id="6" name="Прямоугольник: скругленные углы 5">
+            <a:extLst>
+              <a:ext uri="{FF2B5EF4-FFF2-40B4-BE49-F238E27FC236}">
+                <a16:creationId xmlns:a16="http://schemas.microsoft.com/office/drawing/2014/main" id="{B654143E-344C-C842-C299-4C8FE53BC9BF}"/>
+              </a:ext>
+            </a:extLst>
+          </p:cNvPr>
+          <p:cNvSpPr/>
+          <p:nvPr/>
+        </p:nvSpPr>
+        <p:spPr>
+          <a:xfrm>
+            <a:off x="8144628" y="3532636"/>
+            <a:ext cx="3898204" cy="3240397"/>
+          </a:xfrm>
+          <a:prstGeom prst="roundRect">
+            <a:avLst/>
+          </a:prstGeom>
+          <a:solidFill>
+            <a:srgbClr val="EDE8ED"/>
+          </a:solidFill>
+          <a:ln>
+            <a:solidFill>
+              <a:srgbClr val="EDE8ED"/>
+            </a:solidFill>
+          </a:ln>
+        </p:spPr>
+        <p:style>
+          <a:lnRef idx="2">
+            <a:schemeClr val="accent1">
+              <a:shade val="15000"/>
+            </a:schemeClr>
+          </a:lnRef>
+          <a:fillRef idx="1">
+            <a:schemeClr val="accent1"/>
+          </a:fillRef>
+          <a:effectRef idx="0">
+            <a:schemeClr val="accent1"/>
+          </a:effectRef>
+          <a:fontRef idx="minor">
+            <a:schemeClr val="lt1"/>
+          </a:fontRef>
+        </p:style>
+        <p:txBody>
+          <a:bodyPr lIns="91440" tIns="45720" rIns="91440" bIns="45720" rtlCol="0" anchor="ctr"/>
+          <a:lstStyle/>
+          <a:p>
+            <a:pPr algn="ctr"/>
+            <a:endParaRPr lang="ru-RU" dirty="0"/>
+          </a:p>
+        </p:txBody>
+      </p:sp>
+      <p:sp>
+        <p:nvSpPr>
+          <p:cNvPr id="7" name="TextBox 6">
+            <a:extLst>
+              <a:ext uri="{FF2B5EF4-FFF2-40B4-BE49-F238E27FC236}">
+                <a16:creationId xmlns:a16="http://schemas.microsoft.com/office/drawing/2014/main" id="{719EE245-935D-4B72-A76C-F3A8DC11758F}"/>
+              </a:ext>
+            </a:extLst>
+          </p:cNvPr>
+          <p:cNvSpPr txBox="1"/>
+          <p:nvPr/>
+        </p:nvSpPr>
+        <p:spPr>
+          <a:xfrm>
+            <a:off x="8141918" y="3722421"/>
+            <a:ext cx="3901855" cy="3139321"/>
+          </a:xfrm>
+          <a:prstGeom prst="rect">
+            <a:avLst/>
+          </a:prstGeom>
+          <a:noFill/>
+        </p:spPr>
+        <p:txBody>
+          <a:bodyPr rot="0" spcFirstLastPara="0" vertOverflow="overflow" horzOverflow="overflow" vert="horz" wrap="square" lIns="91440" tIns="45720" rIns="91440" bIns="45720" numCol="1" spcCol="0" rtlCol="0" fromWordArt="0" anchor="ctr" anchorCtr="0" forceAA="0" compatLnSpc="1">
+            <a:prstTxWarp prst="textNoShape">
+              <a:avLst/>
+            </a:prstTxWarp>
+            <a:spAutoFit/>
+          </a:bodyPr>
+          <a:lstStyle/>
+          <a:p>
+            <a:pPr algn="ctr"/>
+            <a:r>
+              <a:rPr lang="ru-RU">
+                <a:solidFill>
+                  <a:srgbClr val="323336"/>
+                </a:solidFill>
+                <a:ea typeface="+mn-lt"/>
+                <a:cs typeface="+mn-lt"/>
+              </a:rPr>
+              <a:t>В нижней части страницы реализован блок комментариев. Это пространство для коммуникации пользователей, где они могут не только обсудить рецепт, но и поделиться практическими советами по приготовлению, адаптации ингредиентов или секретами личного кулинарного опыта</a:t>
+            </a:r>
+            <a:endParaRPr lang="ru-RU"/>
+          </a:p>
+          <a:p>
+            <a:pPr algn="l"/>
+            <a:endParaRPr lang="ru-RU" dirty="0"/>
+          </a:p>
+        </p:txBody>
+      </p:sp>
+      <p:pic>
+        <p:nvPicPr>
+          <p:cNvPr id="3" name="Рисунок 2" descr="Изображение выглядит как текст, снимок экрана, Шрифт, число&#10;&#10;Содержимое, созданное искусственным интеллектом, может быть неверным.">
+            <a:extLst>
+              <a:ext uri="{FF2B5EF4-FFF2-40B4-BE49-F238E27FC236}">
+                <a16:creationId xmlns:a16="http://schemas.microsoft.com/office/drawing/2014/main" id="{E1CCACDE-1F0E-5CF9-A63A-9648AF5E620F}"/>
+              </a:ext>
+            </a:extLst>
+          </p:cNvPr>
+          <p:cNvPicPr>
+            <a:picLocks noChangeAspect="1"/>
+          </p:cNvPicPr>
+          <p:nvPr/>
+        </p:nvPicPr>
+        <p:blipFill>
+          <a:blip r:embed="rId2"/>
+          <a:srcRect r="29307" b="-212"/>
+          <a:stretch>
+            <a:fillRect/>
+          </a:stretch>
+        </p:blipFill>
+        <p:spPr>
+          <a:xfrm>
+            <a:off x="127087" y="272573"/>
+            <a:ext cx="7885758" cy="6504060"/>
           </a:xfrm>
           <a:prstGeom prst="rect">
             <a:avLst/>
@@ -4695,7 +9618,7 @@
     </p:spTree>
     <p:extLst>
       <p:ext uri="{BB962C8B-B14F-4D97-AF65-F5344CB8AC3E}">
-        <p14:creationId xmlns:p14="http://schemas.microsoft.com/office/powerpoint/2010/main" val="4010201446"/>
+        <p14:creationId xmlns:p14="http://schemas.microsoft.com/office/powerpoint/2010/main" val="2381821329"/>
       </p:ext>
     </p:extLst>
   </p:cSld>
